--- a/python/CourseDesign/Week08e/Week8_Lecture16_LTI_Systems_Random_Inputs.pptx
+++ b/python/CourseDesign/Week08e/Week8_Lecture16_LTI_Systems_Random_Inputs.pptx
@@ -4,6 +4,9 @@
   <p:sldMasterIdLst>
     <p:sldMasterId id="2147483648" r:id="rId1"/>
   </p:sldMasterIdLst>
+  <p:notesMasterIdLst>
+    <p:notesMasterId r:id="rId23"/>
+  </p:notesMasterIdLst>
   <p:sldIdLst>
     <p:sldId id="256" r:id="rId2"/>
     <p:sldId id="257" r:id="rId3"/>
@@ -27,9 +30,6 @@
     <p:sldId id="275" r:id="rId21"/>
     <p:sldId id="276" r:id="rId22"/>
   </p:sldIdLst>
-  <p:notesMasterIdLst>
-    <p:notesMasterId r:id="rId23"/>
-  </p:notesMasterIdLst>
   <p:sldSz cx="12192000" cy="6858000"/>
   <p:notesSz cx="6858000" cy="12192000"/>
   <p:defaultTextStyle>
@@ -124,6 +124,11 @@
       </a:defRPr>
     </a:lvl9pPr>
   </p:defaultTextStyle>
+  <p:extLst>
+    <p:ext uri="{EFAFB233-063F-42B5-8137-9DF3F51BA10A}">
+      <p15:sldGuideLst xmlns:p15="http://schemas.microsoft.com/office/powerpoint/2012/main"/>
+    </p:ext>
+  </p:extLst>
 </p:presentation>
 </file>
 
@@ -149,234 +154,10 @@
           <a:chExt cx="0" cy="0"/>
         </a:xfrm>
       </p:grpSpPr>
-      <p:sp>
-        <p:nvSpPr>
-          <p:cNvPr id="2" name="Header Placeholder 1"/>
-          <p:cNvSpPr>
-            <a:spLocks noGrp="1"/>
-          </p:cNvSpPr>
-          <p:nvPr>
-            <p:ph type="hdr" sz="quarter"/>
-          </p:nvPr>
-        </p:nvSpPr>
-        <p:spPr>
-          <a:xfrm>
-            <a:off x="0" y="0"/>
-            <a:ext cx="2971800" cy="458788"/>
-          </a:xfrm>
-          <a:prstGeom prst="rect">
-            <a:avLst/>
-          </a:prstGeom>
-        </p:spPr>
-        <p:txBody>
-          <a:bodyPr vert="horz" lIns="91440" tIns="45720" rIns="91440" bIns="45720" rtlCol="0"/>
-          <a:lstStyle>
-            <a:lvl1pPr algn="l">
-              <a:defRPr sz="1200"/>
-            </a:lvl1pPr>
-          </a:lstStyle>
-          <a:p>
-            <a:endParaRPr lang="en-US"/>
-          </a:p>
-        </p:txBody>
-      </p:sp>
-      <p:sp>
-        <p:nvSpPr>
-          <p:cNvPr id="3" name="Date Placeholder 2"/>
-          <p:cNvSpPr>
-            <a:spLocks noGrp="1"/>
-          </p:cNvSpPr>
-          <p:nvPr>
-            <p:ph type="dt" idx="1"/>
-          </p:nvPr>
-        </p:nvSpPr>
-        <p:spPr>
-          <a:xfrm>
-            <a:off x="3884613" y="0"/>
-            <a:ext cx="2971800" cy="458788"/>
-          </a:xfrm>
-          <a:prstGeom prst="rect">
-            <a:avLst/>
-          </a:prstGeom>
-        </p:spPr>
-        <p:txBody>
-          <a:bodyPr vert="horz" lIns="91440" tIns="45720" rIns="91440" bIns="45720" rtlCol="0"/>
-          <a:lstStyle>
-            <a:lvl1pPr algn="r">
-              <a:defRPr sz="1200"/>
-            </a:lvl1pPr>
-          </a:lstStyle>
-          <a:p>
-            <a:fld id="{5282F153-3F37-0F45-9E97-73ACFA13230C}" type="datetimeFigureOut">
-              <a:rPr lang="en-US"/>
-              <a:t>7/23/19</a:t>
-            </a:fld>
-            <a:endParaRPr lang="en-US"/>
-          </a:p>
-        </p:txBody>
-      </p:sp>
-      <p:sp>
-        <p:nvSpPr>
-          <p:cNvPr id="4" name="Slide Image Placeholder 3"/>
-          <p:cNvSpPr>
-            <a:spLocks noGrp="1" noRot="1" noChangeAspect="1"/>
-          </p:cNvSpPr>
-          <p:nvPr>
-            <p:ph type="sldImg" idx="2"/>
-          </p:nvPr>
-        </p:nvSpPr>
-        <p:spPr>
-          <a:xfrm>
-            <a:off x="685800" y="1143000"/>
-            <a:ext cx="5486400" cy="3086100"/>
-          </a:xfrm>
-          <a:prstGeom prst="rect">
-            <a:avLst/>
-          </a:prstGeom>
-          <a:noFill/>
-          <a:ln w="12700">
-            <a:solidFill>
-              <a:prstClr val="black"/>
-            </a:solidFill>
-          </a:ln>
-        </p:spPr>
-        <p:txBody>
-          <a:bodyPr vert="horz" lIns="91440" tIns="45720" rIns="91440" bIns="45720" rtlCol="0" anchor="ctr"/>
-          <a:lstStyle/>
-          <a:p>
-            <a:endParaRPr lang="en-US"/>
-          </a:p>
-        </p:txBody>
-      </p:sp>
-      <p:sp>
-        <p:nvSpPr>
-          <p:cNvPr id="5" name="Notes Placeholder 4"/>
-          <p:cNvSpPr>
-            <a:spLocks noGrp="1"/>
-          </p:cNvSpPr>
-          <p:nvPr>
-            <p:ph type="body" sz="quarter" idx="3"/>
-          </p:nvPr>
-        </p:nvSpPr>
-        <p:spPr>
-          <a:xfrm>
-            <a:off x="685800" y="4400550"/>
-            <a:ext cx="5486400" cy="3600450"/>
-          </a:xfrm>
-          <a:prstGeom prst="rect">
-            <a:avLst/>
-          </a:prstGeom>
-        </p:spPr>
-        <p:txBody>
-          <a:bodyPr vert="horz" lIns="91440" tIns="45720" rIns="91440" bIns="45720" rtlCol="0"/>
-          <a:lstStyle/>
-          <a:p>
-            <a:pPr lvl="0"/>
-            <a:r>
-              <a:rPr lang="en-US"/>
-              <a:t>Click to edit Master text styles</a:t>
-            </a:r>
-          </a:p>
-          <a:p>
-            <a:pPr lvl="1"/>
-            <a:r>
-              <a:rPr lang="en-US"/>
-              <a:t>Second level</a:t>
-            </a:r>
-          </a:p>
-          <a:p>
-            <a:pPr lvl="2"/>
-            <a:r>
-              <a:rPr lang="en-US"/>
-              <a:t>Third level</a:t>
-            </a:r>
-          </a:p>
-          <a:p>
-            <a:pPr lvl="3"/>
-            <a:r>
-              <a:rPr lang="en-US"/>
-              <a:t>Fourth level</a:t>
-            </a:r>
-          </a:p>
-          <a:p>
-            <a:pPr lvl="4"/>
-            <a:r>
-              <a:rPr lang="en-US"/>
-              <a:t>Fifth level</a:t>
-            </a:r>
-          </a:p>
-        </p:txBody>
-      </p:sp>
-      <p:sp>
-        <p:nvSpPr>
-          <p:cNvPr id="6" name="Footer Placeholder 5"/>
-          <p:cNvSpPr>
-            <a:spLocks noGrp="1"/>
-          </p:cNvSpPr>
-          <p:nvPr>
-            <p:ph type="ftr" sz="quarter" idx="4"/>
-          </p:nvPr>
-        </p:nvSpPr>
-        <p:spPr>
-          <a:xfrm>
-            <a:off x="0" y="8685213"/>
-            <a:ext cx="2971800" cy="458787"/>
-          </a:xfrm>
-          <a:prstGeom prst="rect">
-            <a:avLst/>
-          </a:prstGeom>
-        </p:spPr>
-        <p:txBody>
-          <a:bodyPr vert="horz" lIns="91440" tIns="45720" rIns="91440" bIns="45720" rtlCol="0" anchor="b"/>
-          <a:lstStyle>
-            <a:lvl1pPr algn="l">
-              <a:defRPr sz="1200"/>
-            </a:lvl1pPr>
-          </a:lstStyle>
-          <a:p>
-            <a:endParaRPr lang="en-US"/>
-          </a:p>
-        </p:txBody>
-      </p:sp>
-      <p:sp>
-        <p:nvSpPr>
-          <p:cNvPr id="7" name="Slide Number Placeholder 6"/>
-          <p:cNvSpPr>
-            <a:spLocks noGrp="1"/>
-          </p:cNvSpPr>
-          <p:nvPr>
-            <p:ph type="sldNum" sz="quarter" idx="5"/>
-          </p:nvPr>
-        </p:nvSpPr>
-        <p:spPr>
-          <a:xfrm>
-            <a:off x="3884613" y="8685213"/>
-            <a:ext cx="2971800" cy="458787"/>
-          </a:xfrm>
-          <a:prstGeom prst="rect">
-            <a:avLst/>
-          </a:prstGeom>
-        </p:spPr>
-        <p:txBody>
-          <a:bodyPr vert="horz" lIns="91440" tIns="45720" rIns="91440" bIns="45720" rtlCol="0" anchor="b"/>
-          <a:lstStyle>
-            <a:lvl1pPr algn="r">
-              <a:defRPr sz="1200"/>
-            </a:lvl1pPr>
-          </a:lstStyle>
-          <a:p>
-            <a:fld id="{CE5E9CC1-C706-0F49-92D6-E571CC5EEA8F}" type="slidenum">
-              <a:rPr lang="en-US"/>
-              <a:t>‹#›</a:t>
-            </a:fld>
-            <a:endParaRPr lang="en-US"/>
-          </a:p>
-        </p:txBody>
-      </p:sp>
     </p:spTree>
     <p:extLst>
       <p:ext uri="{BB962C8B-B14F-4D97-AF65-F5344CB8AC3E}">
-        <p14:creationId xmlns:p14="http://schemas.microsoft.com/office/powerpoint/2010/main" val="1024086991"/>
+        <p14:creationId xmlns:p14="http://schemas.microsoft.com/office/powerpoint/2010/main" val="670499396"/>
       </p:ext>
     </p:extLst>
   </p:cSld>
@@ -524,7 +305,6 @@
               <a:rPr lang="en-US" dirty="0"/>
               <a:t>0:00–0:02. Reframe LTI analysis: for a random input we rarely know x[n] exactly, but WSS lets us predict mean, correlation, variance, and spectrum.</a:t>
             </a:r>
-            <a:endParaRPr lang="en-US" dirty="0"/>
           </a:p>
         </p:txBody>
       </p:sp>
@@ -612,7 +392,6 @@
               <a:rPr lang="en-US" dirty="0"/>
               <a:t>0:35–0:43. Connect to the frequency-domain result Syy = Sxx |H|^2, which students will encounter with PSDs.</a:t>
             </a:r>
-            <a:endParaRPr lang="en-US" dirty="0"/>
           </a:p>
         </p:txBody>
       </p:sp>
@@ -700,7 +479,6 @@
               <a:rPr lang="en-US" dirty="0"/>
               <a:t>0:43–0:47. Ask students to reason without equations first.</a:t>
             </a:r>
-            <a:endParaRPr lang="en-US" dirty="0"/>
           </a:p>
         </p:txBody>
       </p:sp>
@@ -788,7 +566,6 @@
               <a:rPr lang="en-US" dirty="0"/>
               <a:t>0:47–0:50. Keep this as a conceptual bridge, not a matrix-algebra detour.</a:t>
             </a:r>
-            <a:endParaRPr lang="en-US" dirty="0"/>
           </a:p>
         </p:txBody>
       </p:sp>
@@ -876,7 +653,6 @@
               <a:rPr lang="en-US" dirty="0"/>
               <a:t>0:50. Transition to the cleanest random-input example.</a:t>
             </a:r>
-            <a:endParaRPr lang="en-US" dirty="0"/>
           </a:p>
         </p:txBody>
       </p:sp>
@@ -964,7 +740,6 @@
               <a:rPr lang="en-US" dirty="0"/>
               <a:t>0:50–0:56. Correct a common misconception: whiteness is about autocorrelation / PSD; Gaussian describes the amplitude distribution.</a:t>
             </a:r>
-            <a:endParaRPr lang="en-US" dirty="0"/>
           </a:p>
         </p:txBody>
       </p:sp>
@@ -1052,7 +827,6 @@
               <a:rPr lang="en-US" dirty="0"/>
               <a:t>0:56–1:02. Have students predict output variance for h={1/2,1/2}: σy²=σ²(1/4+1/4)=σ²/2.</a:t>
             </a:r>
-            <a:endParaRPr lang="en-US" dirty="0"/>
           </a:p>
         </p:txBody>
       </p:sp>
@@ -1140,7 +914,6 @@
               <a:rPr lang="en-US" dirty="0"/>
               <a:t>1:02–1:05. This is a preview if PSD is covered next; keep it intuitive if students have not yet formally defined PSD.</a:t>
             </a:r>
-            <a:endParaRPr lang="en-US" dirty="0"/>
           </a:p>
         </p:txBody>
       </p:sp>
@@ -1228,7 +1001,6 @@
               <a:rPr lang="en-US" dirty="0"/>
               <a:t>1:05. Connect noise statistics to realistic data augmentation.</a:t>
             </a:r>
-            <a:endParaRPr lang="en-US" dirty="0"/>
           </a:p>
         </p:txBody>
       </p:sp>
@@ -1316,7 +1088,6 @@
               <a:rPr lang="en-US" dirty="0"/>
               <a:t>1:05–1:11. Example: microphone / sensor noise is often colored, so white-only augmentation may be an unrealistic prior.</a:t>
             </a:r>
-            <a:endParaRPr lang="en-US" dirty="0"/>
           </a:p>
         </p:txBody>
       </p:sp>
@@ -1404,7 +1175,6 @@
               <a:rPr lang="en-US" dirty="0"/>
               <a:t>1:11–1:14. Notebook includes NumPy/SciPy and PyTorch versions.</a:t>
             </a:r>
-            <a:endParaRPr lang="en-US" dirty="0"/>
           </a:p>
         </p:txBody>
       </p:sp>
@@ -1492,7 +1262,6 @@
               <a:rPr lang="en-US" dirty="0"/>
               <a:t>Core question: Which output properties can be computed from h[n] and the input second-order statistics alone?</a:t>
             </a:r>
-            <a:endParaRPr lang="en-US" dirty="0"/>
           </a:p>
         </p:txBody>
       </p:sp>
@@ -1580,7 +1349,6 @@
               <a:rPr lang="en-US" dirty="0"/>
               <a:t>1:14–1:15. Collect a numerical answer plus one sentence of interpretation.</a:t>
             </a:r>
-            <a:endParaRPr lang="en-US" dirty="0"/>
           </a:p>
         </p:txBody>
       </p:sp>
@@ -1664,10 +1432,6 @@
           <a:bodyPr/>
           <a:lstStyle/>
           <a:p>
-            <a:r>
-              <a:rPr lang="en-US" dirty="0"/>
-              <a:t/>
-            </a:r>
             <a:endParaRPr lang="en-US" dirty="0"/>
           </a:p>
         </p:txBody>
@@ -1756,7 +1520,6 @@
               <a:rPr lang="en-US" dirty="0"/>
               <a:t>0:02–0:03. Start from y[n] = Σ h[k]X[n−k].</a:t>
             </a:r>
-            <a:endParaRPr lang="en-US" dirty="0"/>
           </a:p>
         </p:txBody>
       </p:sp>
@@ -1844,7 +1607,6 @@
               <a:rPr lang="en-US" dirty="0"/>
               <a:t>0:03–0:11. Example h={1/2,1/2}: DC gain 1, so mean unchanged. Difference h={1,-1}: DC gain 0, so output mean is zero even if input mean is nonzero.</a:t>
             </a:r>
-            <a:endParaRPr lang="en-US" dirty="0"/>
           </a:p>
         </p:txBody>
       </p:sp>
@@ -1932,7 +1694,6 @@
               <a:rPr lang="en-US" dirty="0"/>
               <a:t>0:11–0:14. Good answer should mention DC gain, not just arithmetic.</a:t>
             </a:r>
-            <a:endParaRPr lang="en-US" dirty="0"/>
           </a:p>
         </p:txBody>
       </p:sp>
@@ -2020,7 +1781,6 @@
               <a:rPr lang="en-US" dirty="0"/>
               <a:t>0:14–0:20. For the mixed cohort, present the double sum as an interpretation rather than a derivation. Matrix form: var(a^T x)=a^T C a.</a:t>
             </a:r>
-            <a:endParaRPr lang="en-US" dirty="0"/>
           </a:p>
         </p:txBody>
       </p:sp>
@@ -2108,7 +1868,6 @@
               <a:rPr lang="en-US" dirty="0"/>
               <a:t>0:20. Pause to state the correlation convention before any derivation.</a:t>
             </a:r>
-            <a:endParaRPr lang="en-US" dirty="0"/>
           </a:p>
         </p:txBody>
       </p:sp>
@@ -2196,7 +1955,6 @@
               <a:rPr lang="en-US" dirty="0"/>
               <a:t>0:20–0:27. This slide intentionally resolves a common sign/reversal ambiguity. The deck uses the Lecture 15 convention consistently.</a:t>
             </a:r>
-            <a:endParaRPr lang="en-US" dirty="0"/>
           </a:p>
         </p:txBody>
       </p:sp>
@@ -2284,7 +2042,6 @@
               <a:rPr lang="en-US" dirty="0"/>
               <a:t>0:27–0:35. For real signals, drop conjugates to match the course’s earlier notation.</a:t>
             </a:r>
-            <a:endParaRPr lang="en-US" dirty="0"/>
           </a:p>
         </p:txBody>
       </p:sp>
@@ -2362,6 +2119,7 @@
         <a:solidFill>
           <a:srgbClr val="FFFFFF"/>
         </a:solidFill>
+        <a:effectLst/>
       </p:bgPr>
     </p:bg>
     <p:spTree>
@@ -2402,6 +2160,13 @@
             <a:prstDash val="solid"/>
           </a:ln>
         </p:spPr>
+        <p:txBody>
+          <a:bodyPr/>
+          <a:lstStyle/>
+          <a:p>
+            <a:endParaRPr lang="en-US"/>
+          </a:p>
+        </p:txBody>
       </p:sp>
       <p:sp>
         <p:nvSpPr>
@@ -2424,7 +2189,7 @@
           <a:bodyPr wrap="square" lIns="0" tIns="0" rIns="0" bIns="0" rtlCol="0" anchor="ctr"/>
           <a:lstStyle/>
           <a:p>
-            <a:pPr indent="0" marL="0">
+            <a:pPr marL="0" indent="0">
               <a:buNone/>
             </a:pPr>
             <a:r>
@@ -2463,7 +2228,7 @@
           <a:bodyPr wrap="square" lIns="0" tIns="0" rIns="0" bIns="0" rtlCol="0" anchor="ctr"/>
           <a:lstStyle/>
           <a:p>
-            <a:pPr algn="r" indent="0" marL="0">
+            <a:pPr marL="0" indent="0" algn="r">
               <a:buNone/>
             </a:pPr>
             <a:r>
@@ -2503,6 +2268,13 @@
             <a:prstDash val="solid"/>
           </a:ln>
         </p:spPr>
+        <p:txBody>
+          <a:bodyPr/>
+          <a:lstStyle/>
+          <a:p>
+            <a:endParaRPr lang="en-US"/>
+          </a:p>
+        </p:txBody>
       </p:sp>
       <p:sp>
         <p:nvSpPr>
@@ -2524,7 +2296,7 @@
           </a:prstGeom>
           <a:extLst>
             <a:ext uri="{C572A759-6A51-4108-AA02-DFA0A04FC94B}">
-              <ma14:wrappingTextBoxFlag xmlns:ma14="http://schemas.microsoft.com/office/mac/drawingml/2011/main" val="0"/>
+              <ma14:wrappingTextBoxFlag xmlns:ma14="http://schemas.microsoft.com/office/mac/drawingml/2011/main" xmlns="" val="0"/>
             </a:ext>
           </a:extLst>
         </p:spPr>
@@ -2545,8 +2317,8 @@
           <a:p>
             <a:pPr algn="r"/>
             <a:fld id="{F7021451-1387-4CA6-816F-3879F97B5CBC}" type="slidenum">
-              <a:rPr b="0" lang="en-US"/>
-              <a:t>1002</a:t>
+              <a:rPr lang="en-US" b="0"/>
+              <a:t>‹#›</a:t>
             </a:fld>
             <a:endParaRPr lang="en-US"/>
           </a:p>
@@ -2563,6 +2335,11 @@
 <file path=ppt/slideMasters/slideMaster1.xml><?xml version="1.0" encoding="utf-8"?>
 <p:sldMaster xmlns:a="http://schemas.openxmlformats.org/drawingml/2006/main" xmlns:r="http://schemas.openxmlformats.org/officeDocument/2006/relationships" xmlns:p="http://schemas.openxmlformats.org/presentationml/2006/main">
   <p:cSld>
+    <p:bg>
+      <p:bgRef idx="1001">
+        <a:schemeClr val="bg1"/>
+      </p:bgRef>
+    </p:bg>
     <p:spTree>
       <p:nvGrpSpPr>
         <p:cNvPr id="1" name=""/>
@@ -2597,7 +2374,7 @@
           </a:prstGeom>
           <a:extLst>
             <a:ext uri="{C572A759-6A51-4108-AA02-DFA0A04FC94B}">
-              <ma14:wrappingTextBoxFlag xmlns:ma14="http://schemas.microsoft.com/office/mac/drawingml/2011/main" val="0"/>
+              <ma14:wrappingTextBoxFlag xmlns:ma14="http://schemas.microsoft.com/office/mac/drawingml/2011/main" xmlns="" val="0"/>
             </a:ext>
           </a:extLst>
         </p:spPr>
@@ -2618,8 +2395,8 @@
           <a:p>
             <a:pPr algn="r"/>
             <a:fld id="{F7021451-1387-4CA6-816F-3879F97B5CBC}" type="slidenum">
-              <a:rPr b="0" lang="en-US"/>
-              <a:t>null</a:t>
+              <a:rPr lang="en-US" b="0"/>
+              <a:t>‹#›</a:t>
             </a:fld>
             <a:endParaRPr lang="en-US"/>
           </a:p>
@@ -2894,6 +2671,7 @@
         <a:solidFill>
           <a:srgbClr val="17324D"/>
         </a:solidFill>
+        <a:effectLst/>
       </p:bgPr>
     </p:bg>
     <p:spTree>
@@ -2934,6 +2712,13 @@
             <a:prstDash val="solid"/>
           </a:ln>
         </p:spPr>
+        <p:txBody>
+          <a:bodyPr/>
+          <a:lstStyle/>
+          <a:p>
+            <a:endParaRPr lang="en-US"/>
+          </a:p>
+        </p:txBody>
       </p:sp>
       <p:sp>
         <p:nvSpPr>
@@ -2956,7 +2741,7 @@
           <a:bodyPr wrap="square" lIns="0" tIns="0" rIns="0" bIns="0" rtlCol="0" anchor="ctr"/>
           <a:lstStyle/>
           <a:p>
-            <a:pPr indent="0" marL="0">
+            <a:pPr marL="0" indent="0">
               <a:buNone/>
             </a:pPr>
             <a:r>
@@ -2968,7 +2753,7 @@
                 <a:ea typeface="Aptos" pitchFamily="34" charset="-122"/>
                 <a:cs typeface="Aptos" pitchFamily="34" charset="-120"/>
               </a:rPr>
-              <a:t>LECTURE 16</a:t>
+              <a:t>WEEK 8 ● LECTURE 16</a:t>
             </a:r>
             <a:endParaRPr lang="en-US" sz="1200" dirty="0"/>
           </a:p>
@@ -2997,7 +2782,7 @@
           </a:bodyPr>
           <a:lstStyle/>
           <a:p>
-            <a:pPr indent="0" marL="0">
+            <a:pPr marL="0" indent="0">
               <a:buNone/>
             </a:pPr>
             <a:r>
@@ -3036,7 +2821,7 @@
           <a:bodyPr wrap="square" lIns="0" tIns="0" rIns="0" bIns="0" rtlCol="0" anchor="ctr"/>
           <a:lstStyle/>
           <a:p>
-            <a:pPr indent="0" marL="0">
+            <a:pPr marL="0" indent="0">
               <a:buNone/>
             </a:pPr>
             <a:r>
@@ -3078,6 +2863,13 @@
             <a:prstDash val="solid"/>
           </a:ln>
         </p:spPr>
+        <p:txBody>
+          <a:bodyPr/>
+          <a:lstStyle/>
+          <a:p>
+            <a:endParaRPr lang="en-US"/>
+          </a:p>
+        </p:txBody>
       </p:sp>
       <p:sp>
         <p:nvSpPr>
@@ -3102,7 +2894,7 @@
           </a:bodyPr>
           <a:lstStyle/>
           <a:p>
-            <a:pPr algn="ctr" indent="0" marL="0">
+            <a:pPr marL="0" indent="0" algn="ctr">
               <a:buNone/>
             </a:pPr>
             <a:r>
@@ -3144,6 +2936,13 @@
             <a:prstDash val="solid"/>
           </a:ln>
         </p:spPr>
+        <p:txBody>
+          <a:bodyPr/>
+          <a:lstStyle/>
+          <a:p>
+            <a:endParaRPr lang="en-US"/>
+          </a:p>
+        </p:txBody>
       </p:sp>
       <p:sp>
         <p:nvSpPr>
@@ -3168,7 +2967,7 @@
           </a:bodyPr>
           <a:lstStyle/>
           <a:p>
-            <a:pPr algn="ctr" indent="0" marL="0">
+            <a:pPr marL="0" indent="0" algn="ctr">
               <a:buNone/>
             </a:pPr>
             <a:r>
@@ -3207,7 +3006,7 @@
           <a:bodyPr wrap="square" lIns="0" tIns="0" rIns="0" bIns="0" rtlCol="0" anchor="ctr"/>
           <a:lstStyle/>
           <a:p>
-            <a:pPr indent="0" marL="0">
+            <a:pPr marL="0" indent="0">
               <a:buNone/>
             </a:pPr>
             <a:r>
@@ -3271,7 +3070,7 @@
           <a:bodyPr wrap="square" lIns="0" tIns="0" rIns="0" bIns="0" rtlCol="0" anchor="ctr"/>
           <a:lstStyle/>
           <a:p>
-            <a:pPr indent="0" marL="0">
+            <a:pPr marL="0" indent="0">
               <a:buNone/>
             </a:pPr>
             <a:r>
@@ -3310,7 +3109,7 @@
           <a:bodyPr wrap="square" lIns="0" tIns="0" rIns="0" bIns="0" rtlCol="0" anchor="ctr"/>
           <a:lstStyle/>
           <a:p>
-            <a:pPr indent="0" marL="0">
+            <a:pPr marL="0" indent="0">
               <a:buNone/>
             </a:pPr>
             <a:r>
@@ -3352,6 +3151,13 @@
             <a:prstDash val="solid"/>
           </a:ln>
         </p:spPr>
+        <p:txBody>
+          <a:bodyPr/>
+          <a:lstStyle/>
+          <a:p>
+            <a:endParaRPr lang="en-US"/>
+          </a:p>
+        </p:txBody>
       </p:sp>
       <p:sp>
         <p:nvSpPr>
@@ -3376,7 +3182,7 @@
           </a:bodyPr>
           <a:lstStyle/>
           <a:p>
-            <a:pPr algn="ctr" indent="0" marL="0">
+            <a:pPr marL="0" indent="0" algn="ctr">
               <a:buNone/>
             </a:pPr>
             <a:r>
@@ -3418,6 +3224,13 @@
             <a:prstDash val="solid"/>
           </a:ln>
         </p:spPr>
+        <p:txBody>
+          <a:bodyPr/>
+          <a:lstStyle/>
+          <a:p>
+            <a:endParaRPr lang="en-US"/>
+          </a:p>
+        </p:txBody>
       </p:sp>
       <p:sp>
         <p:nvSpPr>
@@ -3442,7 +3255,7 @@
           </a:bodyPr>
           <a:lstStyle/>
           <a:p>
-            <a:pPr algn="ctr" indent="0" marL="0">
+            <a:pPr marL="0" indent="0" algn="ctr">
               <a:buNone/>
             </a:pPr>
             <a:r>
@@ -3484,6 +3297,13 @@
             <a:prstDash val="solid"/>
           </a:ln>
         </p:spPr>
+        <p:txBody>
+          <a:bodyPr/>
+          <a:lstStyle/>
+          <a:p>
+            <a:endParaRPr lang="en-US"/>
+          </a:p>
+        </p:txBody>
       </p:sp>
       <p:sp>
         <p:nvSpPr>
@@ -3508,7 +3328,7 @@
           </a:bodyPr>
           <a:lstStyle/>
           <a:p>
-            <a:pPr algn="ctr" indent="0" marL="0">
+            <a:pPr marL="0" indent="0" algn="ctr">
               <a:buNone/>
             </a:pPr>
             <a:r>
@@ -3624,7 +3444,7 @@
           </a:prstGeom>
           <a:extLst>
             <a:ext uri="{C572A759-6A51-4108-AA02-DFA0A04FC94B}">
-              <ma14:wrappingTextBoxFlag xmlns:ma14="http://schemas.microsoft.com/office/mac/drawingml/2011/main" val="0"/>
+              <ma14:wrappingTextBoxFlag xmlns:ma14="http://schemas.microsoft.com/office/mac/drawingml/2011/main" xmlns="" val="0"/>
             </a:ext>
           </a:extLst>
         </p:spPr>
@@ -3645,7 +3465,7 @@
           <a:p>
             <a:pPr algn="r"/>
             <a:fld id="{F7021451-1387-4CA6-816F-3879F97B5CBC}" type="slidenum">
-              <a:rPr b="0" lang="en-US"/>
+              <a:rPr lang="en-US" b="0"/>
               <a:t>10</a:t>
             </a:fld>
             <a:endParaRPr lang="en-US"/>
@@ -3701,6 +3521,13 @@
             <a:prstDash val="solid"/>
           </a:ln>
         </p:spPr>
+        <p:txBody>
+          <a:bodyPr/>
+          <a:lstStyle/>
+          <a:p>
+            <a:endParaRPr lang="en-US"/>
+          </a:p>
+        </p:txBody>
       </p:sp>
       <p:sp>
         <p:nvSpPr>
@@ -3723,7 +3550,7 @@
           <a:bodyPr wrap="square" lIns="0" tIns="0" rIns="0" bIns="0" rtlCol="0" anchor="ctr"/>
           <a:lstStyle/>
           <a:p>
-            <a:pPr indent="0" marL="0">
+            <a:pPr marL="0" indent="0">
               <a:buNone/>
             </a:pPr>
             <a:r>
@@ -3764,7 +3591,7 @@
           </a:bodyPr>
           <a:lstStyle/>
           <a:p>
-            <a:pPr indent="0" marL="0">
+            <a:pPr marL="0" indent="0">
               <a:buNone/>
             </a:pPr>
             <a:r>
@@ -3803,7 +3630,7 @@
           <a:bodyPr wrap="square" lIns="0" tIns="0" rIns="0" bIns="0" rtlCol="0" anchor="ctr"/>
           <a:lstStyle/>
           <a:p>
-            <a:pPr indent="0" marL="0">
+            <a:pPr marL="0" indent="0">
               <a:buNone/>
             </a:pPr>
             <a:r>
@@ -3844,7 +3671,7 @@
           </a:bodyPr>
           <a:lstStyle/>
           <a:p>
-            <a:pPr indent="0" marL="0">
+            <a:pPr marL="0" indent="0">
               <a:buNone/>
             </a:pPr>
             <a:r>
@@ -3882,7 +3709,7 @@
           </a:prstGeom>
           <a:extLst>
             <a:ext uri="{C572A759-6A51-4108-AA02-DFA0A04FC94B}">
-              <ma14:wrappingTextBoxFlag xmlns:ma14="http://schemas.microsoft.com/office/mac/drawingml/2011/main" val="0"/>
+              <ma14:wrappingTextBoxFlag xmlns:ma14="http://schemas.microsoft.com/office/mac/drawingml/2011/main" xmlns="" val="0"/>
             </a:ext>
           </a:extLst>
         </p:spPr>
@@ -3903,7 +3730,7 @@
           <a:p>
             <a:pPr algn="r"/>
             <a:fld id="{F7021451-1387-4CA6-816F-3879F97B5CBC}" type="slidenum">
-              <a:rPr b="0" lang="en-US"/>
+              <a:rPr lang="en-US" b="0"/>
               <a:t>11</a:t>
             </a:fld>
             <a:endParaRPr lang="en-US"/>
@@ -3956,7 +3783,7 @@
           <a:bodyPr wrap="square" lIns="0" tIns="0" rIns="0" bIns="0" rtlCol="0" anchor="ctr"/>
           <a:lstStyle/>
           <a:p>
-            <a:pPr indent="0" marL="0">
+            <a:pPr marL="0" indent="0">
               <a:buNone/>
             </a:pPr>
             <a:r>
@@ -3995,7 +3822,7 @@
           <a:bodyPr wrap="square" lIns="0" tIns="0" rIns="0" bIns="0" rtlCol="0" anchor="ctr"/>
           <a:lstStyle/>
           <a:p>
-            <a:pPr indent="0" marL="0">
+            <a:pPr marL="0" indent="0">
               <a:buNone/>
             </a:pPr>
             <a:r>
@@ -4037,6 +3864,13 @@
             <a:prstDash val="solid"/>
           </a:ln>
         </p:spPr>
+        <p:txBody>
+          <a:bodyPr/>
+          <a:lstStyle/>
+          <a:p>
+            <a:endParaRPr lang="en-US"/>
+          </a:p>
+        </p:txBody>
       </p:sp>
       <p:sp>
         <p:nvSpPr>
@@ -4061,7 +3895,7 @@
           </a:bodyPr>
           <a:lstStyle/>
           <a:p>
-            <a:pPr algn="ctr" indent="0" marL="0">
+            <a:pPr marL="0" indent="0" algn="ctr">
               <a:buNone/>
             </a:pPr>
             <a:r>
@@ -4103,6 +3937,13 @@
             <a:prstDash val="solid"/>
           </a:ln>
         </p:spPr>
+        <p:txBody>
+          <a:bodyPr/>
+          <a:lstStyle/>
+          <a:p>
+            <a:endParaRPr lang="en-US"/>
+          </a:p>
+        </p:txBody>
       </p:sp>
       <p:sp>
         <p:nvSpPr>
@@ -4127,7 +3968,7 @@
           </a:bodyPr>
           <a:lstStyle/>
           <a:p>
-            <a:pPr algn="ctr" indent="0" marL="0">
+            <a:pPr marL="0" indent="0" algn="ctr">
               <a:buNone/>
             </a:pPr>
             <a:r>
@@ -4249,6 +4090,13 @@
             <a:prstDash val="solid"/>
           </a:ln>
         </p:spPr>
+        <p:txBody>
+          <a:bodyPr/>
+          <a:lstStyle/>
+          <a:p>
+            <a:endParaRPr lang="en-US"/>
+          </a:p>
+        </p:txBody>
       </p:sp>
       <p:sp>
         <p:nvSpPr>
@@ -4274,6 +4122,13 @@
             <a:prstDash val="solid"/>
           </a:ln>
         </p:spPr>
+        <p:txBody>
+          <a:bodyPr/>
+          <a:lstStyle/>
+          <a:p>
+            <a:endParaRPr lang="en-US"/>
+          </a:p>
+        </p:txBody>
       </p:sp>
       <p:sp>
         <p:nvSpPr>
@@ -4296,7 +4151,7 @@
           <a:bodyPr wrap="square" lIns="0" tIns="0" rIns="0" bIns="0" rtlCol="0" anchor="ctr"/>
           <a:lstStyle/>
           <a:p>
-            <a:pPr indent="0" marL="0">
+            <a:pPr marL="0" indent="0">
               <a:buNone/>
             </a:pPr>
             <a:r>
@@ -4333,11 +4188,11 @@
         </p:spPr>
         <p:txBody>
           <a:bodyPr wrap="square" lIns="0" tIns="0" rIns="0" bIns="0" rtlCol="0" anchor="t">
-            <a:normAutofit/>
+            <a:normAutofit fontScale="92500"/>
           </a:bodyPr>
           <a:lstStyle/>
           <a:p>
-            <a:pPr indent="0" marL="0">
+            <a:pPr marL="0" indent="0">
               <a:buNone/>
             </a:pPr>
             <a:r>
@@ -4375,7 +4230,7 @@
           </a:prstGeom>
           <a:extLst>
             <a:ext uri="{C572A759-6A51-4108-AA02-DFA0A04FC94B}">
-              <ma14:wrappingTextBoxFlag xmlns:ma14="http://schemas.microsoft.com/office/mac/drawingml/2011/main" val="0"/>
+              <ma14:wrappingTextBoxFlag xmlns:ma14="http://schemas.microsoft.com/office/mac/drawingml/2011/main" xmlns="" val="0"/>
             </a:ext>
           </a:extLst>
         </p:spPr>
@@ -4396,7 +4251,7 @@
           <a:p>
             <a:pPr algn="r"/>
             <a:fld id="{F7021451-1387-4CA6-816F-3879F97B5CBC}" type="slidenum">
-              <a:rPr b="0" lang="en-US"/>
+              <a:rPr lang="en-US" b="0"/>
               <a:t>12</a:t>
             </a:fld>
             <a:endParaRPr lang="en-US"/>
@@ -4419,6 +4274,7 @@
         <a:solidFill>
           <a:srgbClr val="17324D"/>
         </a:solidFill>
+        <a:effectLst/>
       </p:bgPr>
     </p:bg>
     <p:spTree>
@@ -4456,7 +4312,7 @@
           <a:bodyPr wrap="square" lIns="0" tIns="0" rIns="0" bIns="0" rtlCol="0" anchor="ctr"/>
           <a:lstStyle/>
           <a:p>
-            <a:pPr indent="0" marL="0">
+            <a:pPr marL="0" indent="0">
               <a:buNone/>
             </a:pPr>
             <a:r>
@@ -4495,7 +4351,7 @@
           <a:bodyPr wrap="square" lIns="0" tIns="0" rIns="0" bIns="0" rtlCol="0" anchor="ctr"/>
           <a:lstStyle/>
           <a:p>
-            <a:pPr indent="0" marL="0">
+            <a:pPr marL="0" indent="0">
               <a:buNone/>
             </a:pPr>
             <a:r>
@@ -4534,7 +4390,7 @@
           <a:bodyPr wrap="square" lIns="0" tIns="0" rIns="0" bIns="0" rtlCol="0" anchor="ctr"/>
           <a:lstStyle/>
           <a:p>
-            <a:pPr indent="0" marL="0">
+            <a:pPr marL="0" indent="0">
               <a:buNone/>
             </a:pPr>
             <a:r>
@@ -4572,7 +4428,7 @@
           </a:prstGeom>
           <a:extLst>
             <a:ext uri="{C572A759-6A51-4108-AA02-DFA0A04FC94B}">
-              <ma14:wrappingTextBoxFlag xmlns:ma14="http://schemas.microsoft.com/office/mac/drawingml/2011/main" val="0"/>
+              <ma14:wrappingTextBoxFlag xmlns:ma14="http://schemas.microsoft.com/office/mac/drawingml/2011/main" xmlns="" val="0"/>
             </a:ext>
           </a:extLst>
         </p:spPr>
@@ -4593,7 +4449,7 @@
           <a:p>
             <a:pPr algn="r"/>
             <a:fld id="{F7021451-1387-4CA6-816F-3879F97B5CBC}" type="slidenum">
-              <a:rPr b="0" lang="en-US"/>
+              <a:rPr lang="en-US" b="0"/>
               <a:t>13</a:t>
             </a:fld>
             <a:endParaRPr lang="en-US"/>
@@ -4646,7 +4502,7 @@
           <a:bodyPr wrap="square" lIns="0" tIns="0" rIns="0" bIns="0" rtlCol="0" anchor="ctr"/>
           <a:lstStyle/>
           <a:p>
-            <a:pPr indent="0" marL="0">
+            <a:pPr marL="0" indent="0">
               <a:buNone/>
             </a:pPr>
             <a:r>
@@ -4685,7 +4541,7 @@
           <a:bodyPr wrap="square" lIns="0" tIns="0" rIns="0" bIns="0" rtlCol="0" anchor="ctr"/>
           <a:lstStyle/>
           <a:p>
-            <a:pPr indent="0" marL="0">
+            <a:pPr marL="0" indent="0">
               <a:buNone/>
             </a:pPr>
             <a:r>
@@ -4727,6 +4583,13 @@
             <a:prstDash val="solid"/>
           </a:ln>
         </p:spPr>
+        <p:txBody>
+          <a:bodyPr/>
+          <a:lstStyle/>
+          <a:p>
+            <a:endParaRPr lang="en-US"/>
+          </a:p>
+        </p:txBody>
       </p:sp>
       <p:sp>
         <p:nvSpPr>
@@ -4751,7 +4614,7 @@
           </a:bodyPr>
           <a:lstStyle/>
           <a:p>
-            <a:pPr algn="ctr" indent="0" marL="0">
+            <a:pPr marL="0" indent="0" algn="ctr">
               <a:buNone/>
             </a:pPr>
             <a:r>
@@ -4849,14 +4712,14 @@
       </p:sp>
       <p:pic>
         <p:nvPicPr>
-          <p:cNvPr id="7" name="Image 0" descr="/mnt/data/week8_random_signals/assets/acf_white_ar1.png">    </p:cNvPr>
+          <p:cNvPr id="7" name="Image 0" descr="/mnt/data/week8_random_signals/assets/acf_white_ar1.png"/>
           <p:cNvPicPr>
             <a:picLocks noChangeAspect="1"/>
           </p:cNvPicPr>
           <p:nvPr/>
         </p:nvPicPr>
         <p:blipFill>
-          <a:blip r:embed="rId1"/>
+          <a:blip r:embed="rId3"/>
           <a:stretch>
             <a:fillRect/>
           </a:stretch>
@@ -4891,7 +4754,7 @@
           </a:prstGeom>
           <a:extLst>
             <a:ext uri="{C572A759-6A51-4108-AA02-DFA0A04FC94B}">
-              <ma14:wrappingTextBoxFlag xmlns:ma14="http://schemas.microsoft.com/office/mac/drawingml/2011/main" val="0"/>
+              <ma14:wrappingTextBoxFlag xmlns:ma14="http://schemas.microsoft.com/office/mac/drawingml/2011/main" xmlns="" val="0"/>
             </a:ext>
           </a:extLst>
         </p:spPr>
@@ -4912,7 +4775,7 @@
           <a:p>
             <a:pPr algn="r"/>
             <a:fld id="{F7021451-1387-4CA6-816F-3879F97B5CBC}" type="slidenum">
-              <a:rPr b="0" lang="en-US"/>
+              <a:rPr lang="en-US" b="0"/>
               <a:t>14</a:t>
             </a:fld>
             <a:endParaRPr lang="en-US"/>
@@ -4965,7 +4828,7 @@
           <a:bodyPr wrap="square" lIns="0" tIns="0" rIns="0" bIns="0" rtlCol="0" anchor="ctr"/>
           <a:lstStyle/>
           <a:p>
-            <a:pPr indent="0" marL="0">
+            <a:pPr marL="0" indent="0">
               <a:buNone/>
             </a:pPr>
             <a:r>
@@ -5004,7 +4867,7 @@
           <a:bodyPr wrap="square" lIns="0" tIns="0" rIns="0" bIns="0" rtlCol="0" anchor="ctr"/>
           <a:lstStyle/>
           <a:p>
-            <a:pPr indent="0" marL="0">
+            <a:pPr marL="0" indent="0">
               <a:buNone/>
             </a:pPr>
             <a:r>
@@ -5046,6 +4909,13 @@
             <a:prstDash val="solid"/>
           </a:ln>
         </p:spPr>
+        <p:txBody>
+          <a:bodyPr/>
+          <a:lstStyle/>
+          <a:p>
+            <a:endParaRPr lang="en-US"/>
+          </a:p>
+        </p:txBody>
       </p:sp>
       <p:sp>
         <p:nvSpPr>
@@ -5070,7 +4940,7 @@
           </a:bodyPr>
           <a:lstStyle/>
           <a:p>
-            <a:pPr algn="ctr" indent="0" marL="0">
+            <a:pPr marL="0" indent="0" algn="ctr">
               <a:buNone/>
             </a:pPr>
             <a:r>
@@ -5112,6 +4982,13 @@
             <a:prstDash val="solid"/>
           </a:ln>
         </p:spPr>
+        <p:txBody>
+          <a:bodyPr/>
+          <a:lstStyle/>
+          <a:p>
+            <a:endParaRPr lang="en-US"/>
+          </a:p>
+        </p:txBody>
       </p:sp>
       <p:sp>
         <p:nvSpPr>
@@ -5136,7 +5013,7 @@
           </a:bodyPr>
           <a:lstStyle/>
           <a:p>
-            <a:pPr algn="ctr" indent="0" marL="0">
+            <a:pPr marL="0" indent="0" algn="ctr">
               <a:buNone/>
             </a:pPr>
             <a:r>
@@ -5156,14 +5033,14 @@
       </p:sp>
       <p:pic>
         <p:nvPicPr>
-          <p:cNvPr id="8" name="Image 0" descr="/mnt/data/week8_random_signals/assets/white_noise_coloring.png">    </p:cNvPr>
+          <p:cNvPr id="8" name="Image 0" descr="/mnt/data/week8_random_signals/assets/white_noise_coloring.png"/>
           <p:cNvPicPr>
             <a:picLocks noChangeAspect="1"/>
           </p:cNvPicPr>
           <p:nvPr/>
         </p:nvPicPr>
         <p:blipFill>
-          <a:blip r:embed="rId1"/>
+          <a:blip r:embed="rId3"/>
           <a:stretch>
             <a:fillRect/>
           </a:stretch>
@@ -5204,6 +5081,13 @@
             <a:prstDash val="solid"/>
           </a:ln>
         </p:spPr>
+        <p:txBody>
+          <a:bodyPr/>
+          <a:lstStyle/>
+          <a:p>
+            <a:endParaRPr lang="en-US"/>
+          </a:p>
+        </p:txBody>
       </p:sp>
       <p:sp>
         <p:nvSpPr>
@@ -5229,6 +5113,13 @@
             <a:prstDash val="solid"/>
           </a:ln>
         </p:spPr>
+        <p:txBody>
+          <a:bodyPr/>
+          <a:lstStyle/>
+          <a:p>
+            <a:endParaRPr lang="en-US"/>
+          </a:p>
+        </p:txBody>
       </p:sp>
       <p:sp>
         <p:nvSpPr>
@@ -5251,7 +5142,7 @@
           <a:bodyPr wrap="square" lIns="0" tIns="0" rIns="0" bIns="0" rtlCol="0" anchor="ctr"/>
           <a:lstStyle/>
           <a:p>
-            <a:pPr indent="0" marL="0">
+            <a:pPr marL="0" indent="0">
               <a:buNone/>
             </a:pPr>
             <a:r>
@@ -5292,7 +5183,7 @@
           </a:bodyPr>
           <a:lstStyle/>
           <a:p>
-            <a:pPr indent="0" marL="0">
+            <a:pPr marL="0" indent="0">
               <a:buNone/>
             </a:pPr>
             <a:r>
@@ -5336,6 +5227,13 @@
             <a:prstDash val="solid"/>
           </a:ln>
         </p:spPr>
+        <p:txBody>
+          <a:bodyPr/>
+          <a:lstStyle/>
+          <a:p>
+            <a:endParaRPr lang="en-US"/>
+          </a:p>
+        </p:txBody>
       </p:sp>
       <p:sp>
         <p:nvSpPr>
@@ -5361,6 +5259,13 @@
             <a:prstDash val="solid"/>
           </a:ln>
         </p:spPr>
+        <p:txBody>
+          <a:bodyPr/>
+          <a:lstStyle/>
+          <a:p>
+            <a:endParaRPr lang="en-US"/>
+          </a:p>
+        </p:txBody>
       </p:sp>
       <p:sp>
         <p:nvSpPr>
@@ -5383,7 +5288,7 @@
           <a:bodyPr wrap="square" lIns="0" tIns="0" rIns="0" bIns="0" rtlCol="0" anchor="ctr"/>
           <a:lstStyle/>
           <a:p>
-            <a:pPr indent="0" marL="0">
+            <a:pPr marL="0" indent="0">
               <a:buNone/>
             </a:pPr>
             <a:r>
@@ -5424,7 +5329,7 @@
           </a:bodyPr>
           <a:lstStyle/>
           <a:p>
-            <a:pPr indent="0" marL="0">
+            <a:pPr marL="0" indent="0">
               <a:buNone/>
             </a:pPr>
             <a:r>
@@ -5462,7 +5367,7 @@
           </a:prstGeom>
           <a:extLst>
             <a:ext uri="{C572A759-6A51-4108-AA02-DFA0A04FC94B}">
-              <ma14:wrappingTextBoxFlag xmlns:ma14="http://schemas.microsoft.com/office/mac/drawingml/2011/main" val="0"/>
+              <ma14:wrappingTextBoxFlag xmlns:ma14="http://schemas.microsoft.com/office/mac/drawingml/2011/main" xmlns="" val="0"/>
             </a:ext>
           </a:extLst>
         </p:spPr>
@@ -5483,7 +5388,7 @@
           <a:p>
             <a:pPr algn="r"/>
             <a:fld id="{F7021451-1387-4CA6-816F-3879F97B5CBC}" type="slidenum">
-              <a:rPr b="0" lang="en-US"/>
+              <a:rPr lang="en-US" b="0"/>
               <a:t>15</a:t>
             </a:fld>
             <a:endParaRPr lang="en-US"/>
@@ -5536,7 +5441,7 @@
           <a:bodyPr wrap="square" lIns="0" tIns="0" rIns="0" bIns="0" rtlCol="0" anchor="ctr"/>
           <a:lstStyle/>
           <a:p>
-            <a:pPr indent="0" marL="0">
+            <a:pPr marL="0" indent="0">
               <a:buNone/>
             </a:pPr>
             <a:r>
@@ -5575,7 +5480,7 @@
           <a:bodyPr wrap="square" lIns="0" tIns="0" rIns="0" bIns="0" rtlCol="0" anchor="ctr"/>
           <a:lstStyle/>
           <a:p>
-            <a:pPr indent="0" marL="0">
+            <a:pPr marL="0" indent="0">
               <a:buNone/>
             </a:pPr>
             <a:r>
@@ -5617,6 +5522,13 @@
             <a:prstDash val="solid"/>
           </a:ln>
         </p:spPr>
+        <p:txBody>
+          <a:bodyPr/>
+          <a:lstStyle/>
+          <a:p>
+            <a:endParaRPr lang="en-US"/>
+          </a:p>
+        </p:txBody>
       </p:sp>
       <p:sp>
         <p:nvSpPr>
@@ -5641,7 +5553,7 @@
           </a:bodyPr>
           <a:lstStyle/>
           <a:p>
-            <a:pPr algn="ctr" indent="0" marL="0">
+            <a:pPr marL="0" indent="0" algn="ctr">
               <a:buNone/>
             </a:pPr>
             <a:r>
@@ -5683,6 +5595,13 @@
             <a:prstDash val="solid"/>
           </a:ln>
         </p:spPr>
+        <p:txBody>
+          <a:bodyPr/>
+          <a:lstStyle/>
+          <a:p>
+            <a:endParaRPr lang="en-US"/>
+          </a:p>
+        </p:txBody>
       </p:sp>
       <p:sp>
         <p:nvSpPr>
@@ -5707,7 +5626,7 @@
           </a:bodyPr>
           <a:lstStyle/>
           <a:p>
-            <a:pPr algn="ctr" indent="0" marL="0">
+            <a:pPr marL="0" indent="0" algn="ctr">
               <a:buNone/>
             </a:pPr>
             <a:r>
@@ -5727,14 +5646,14 @@
       </p:sp>
       <p:pic>
         <p:nvPicPr>
-          <p:cNvPr id="8" name="Image 0" descr="/mnt/data/week8_random_signals/assets/noise_psd_coloring.png">    </p:cNvPr>
+          <p:cNvPr id="8" name="Image 0" descr="/mnt/data/week8_random_signals/assets/noise_psd_coloring.png"/>
           <p:cNvPicPr>
             <a:picLocks noChangeAspect="1"/>
           </p:cNvPicPr>
           <p:nvPr/>
         </p:nvPicPr>
         <p:blipFill>
-          <a:blip r:embed="rId1"/>
+          <a:blip r:embed="rId3"/>
           <a:stretch>
             <a:fillRect/>
           </a:stretch>
@@ -5775,6 +5694,13 @@
             <a:prstDash val="solid"/>
           </a:ln>
         </p:spPr>
+        <p:txBody>
+          <a:bodyPr/>
+          <a:lstStyle/>
+          <a:p>
+            <a:endParaRPr lang="en-US"/>
+          </a:p>
+        </p:txBody>
       </p:sp>
       <p:sp>
         <p:nvSpPr>
@@ -5800,6 +5726,13 @@
             <a:prstDash val="solid"/>
           </a:ln>
         </p:spPr>
+        <p:txBody>
+          <a:bodyPr/>
+          <a:lstStyle/>
+          <a:p>
+            <a:endParaRPr lang="en-US"/>
+          </a:p>
+        </p:txBody>
       </p:sp>
       <p:sp>
         <p:nvSpPr>
@@ -5822,7 +5755,7 @@
           <a:bodyPr wrap="square" lIns="0" tIns="0" rIns="0" bIns="0" rtlCol="0" anchor="ctr"/>
           <a:lstStyle/>
           <a:p>
-            <a:pPr indent="0" marL="0">
+            <a:pPr marL="0" indent="0">
               <a:buNone/>
             </a:pPr>
             <a:r>
@@ -5863,7 +5796,7 @@
           </a:bodyPr>
           <a:lstStyle/>
           <a:p>
-            <a:pPr indent="0" marL="0">
+            <a:pPr marL="0" indent="0">
               <a:buNone/>
             </a:pPr>
             <a:r>
@@ -5901,7 +5834,7 @@
           </a:prstGeom>
           <a:extLst>
             <a:ext uri="{C572A759-6A51-4108-AA02-DFA0A04FC94B}">
-              <ma14:wrappingTextBoxFlag xmlns:ma14="http://schemas.microsoft.com/office/mac/drawingml/2011/main" val="0"/>
+              <ma14:wrappingTextBoxFlag xmlns:ma14="http://schemas.microsoft.com/office/mac/drawingml/2011/main" xmlns="" val="0"/>
             </a:ext>
           </a:extLst>
         </p:spPr>
@@ -5922,7 +5855,7 @@
           <a:p>
             <a:pPr algn="r"/>
             <a:fld id="{F7021451-1387-4CA6-816F-3879F97B5CBC}" type="slidenum">
-              <a:rPr b="0" lang="en-US"/>
+              <a:rPr lang="en-US" b="0"/>
               <a:t>16</a:t>
             </a:fld>
             <a:endParaRPr lang="en-US"/>
@@ -5945,6 +5878,7 @@
         <a:solidFill>
           <a:srgbClr val="17324D"/>
         </a:solidFill>
+        <a:effectLst/>
       </p:bgPr>
     </p:bg>
     <p:spTree>
@@ -5982,7 +5916,7 @@
           <a:bodyPr wrap="square" lIns="0" tIns="0" rIns="0" bIns="0" rtlCol="0" anchor="ctr"/>
           <a:lstStyle/>
           <a:p>
-            <a:pPr indent="0" marL="0">
+            <a:pPr marL="0" indent="0">
               <a:buNone/>
             </a:pPr>
             <a:r>
@@ -6021,7 +5955,7 @@
           <a:bodyPr wrap="square" lIns="0" tIns="0" rIns="0" bIns="0" rtlCol="0" anchor="ctr"/>
           <a:lstStyle/>
           <a:p>
-            <a:pPr indent="0" marL="0">
+            <a:pPr marL="0" indent="0">
               <a:buNone/>
             </a:pPr>
             <a:r>
@@ -6060,7 +5994,7 @@
           <a:bodyPr wrap="square" lIns="0" tIns="0" rIns="0" bIns="0" rtlCol="0" anchor="ctr"/>
           <a:lstStyle/>
           <a:p>
-            <a:pPr indent="0" marL="0">
+            <a:pPr marL="0" indent="0">
               <a:buNone/>
             </a:pPr>
             <a:r>
@@ -6098,7 +6032,7 @@
           </a:prstGeom>
           <a:extLst>
             <a:ext uri="{C572A759-6A51-4108-AA02-DFA0A04FC94B}">
-              <ma14:wrappingTextBoxFlag xmlns:ma14="http://schemas.microsoft.com/office/mac/drawingml/2011/main" val="0"/>
+              <ma14:wrappingTextBoxFlag xmlns:ma14="http://schemas.microsoft.com/office/mac/drawingml/2011/main" xmlns="" val="0"/>
             </a:ext>
           </a:extLst>
         </p:spPr>
@@ -6119,7 +6053,7 @@
           <a:p>
             <a:pPr algn="r"/>
             <a:fld id="{F7021451-1387-4CA6-816F-3879F97B5CBC}" type="slidenum">
-              <a:rPr b="0" lang="en-US"/>
+              <a:rPr lang="en-US" b="0"/>
               <a:t>17</a:t>
             </a:fld>
             <a:endParaRPr lang="en-US"/>
@@ -6172,7 +6106,7 @@
           <a:bodyPr wrap="square" lIns="0" tIns="0" rIns="0" bIns="0" rtlCol="0" anchor="ctr"/>
           <a:lstStyle/>
           <a:p>
-            <a:pPr indent="0" marL="0">
+            <a:pPr marL="0" indent="0">
               <a:buNone/>
             </a:pPr>
             <a:r>
@@ -6211,7 +6145,7 @@
           <a:bodyPr wrap="square" lIns="0" tIns="0" rIns="0" bIns="0" rtlCol="0" anchor="ctr"/>
           <a:lstStyle/>
           <a:p>
-            <a:pPr indent="0" marL="0">
+            <a:pPr marL="0" indent="0">
               <a:buNone/>
             </a:pPr>
             <a:r>
@@ -6231,14 +6165,14 @@
       </p:sp>
       <p:pic>
         <p:nvPicPr>
-          <p:cNvPr id="4" name="Image 0" descr="/mnt/data/week8_random_signals/assets/noise_augmentation.png">    </p:cNvPr>
+          <p:cNvPr id="4" name="Image 0" descr="/mnt/data/week8_random_signals/assets/noise_augmentation.png"/>
           <p:cNvPicPr>
             <a:picLocks noChangeAspect="1"/>
           </p:cNvPicPr>
           <p:nvPr/>
         </p:nvPicPr>
         <p:blipFill>
-          <a:blip r:embed="rId1"/>
+          <a:blip r:embed="rId3"/>
           <a:stretch>
             <a:fillRect/>
           </a:stretch>
@@ -6375,6 +6309,13 @@
             <a:prstDash val="solid"/>
           </a:ln>
         </p:spPr>
+        <p:txBody>
+          <a:bodyPr/>
+          <a:lstStyle/>
+          <a:p>
+            <a:endParaRPr lang="en-US"/>
+          </a:p>
+        </p:txBody>
       </p:sp>
       <p:sp>
         <p:nvSpPr>
@@ -6400,6 +6341,13 @@
             <a:prstDash val="solid"/>
           </a:ln>
         </p:spPr>
+        <p:txBody>
+          <a:bodyPr/>
+          <a:lstStyle/>
+          <a:p>
+            <a:endParaRPr lang="en-US"/>
+          </a:p>
+        </p:txBody>
       </p:sp>
       <p:sp>
         <p:nvSpPr>
@@ -6422,7 +6370,7 @@
           <a:bodyPr wrap="square" lIns="0" tIns="0" rIns="0" bIns="0" rtlCol="0" anchor="ctr"/>
           <a:lstStyle/>
           <a:p>
-            <a:pPr indent="0" marL="0">
+            <a:pPr marL="0" indent="0">
               <a:buNone/>
             </a:pPr>
             <a:r>
@@ -6459,11 +6407,11 @@
         </p:spPr>
         <p:txBody>
           <a:bodyPr wrap="square" lIns="0" tIns="0" rIns="0" bIns="0" rtlCol="0" anchor="t">
-            <a:normAutofit/>
+            <a:normAutofit fontScale="62500" lnSpcReduction="20000"/>
           </a:bodyPr>
           <a:lstStyle/>
           <a:p>
-            <a:pPr indent="0" marL="0">
+            <a:pPr marL="0" indent="0">
               <a:buNone/>
             </a:pPr>
             <a:r>
@@ -6501,7 +6449,7 @@
           </a:prstGeom>
           <a:extLst>
             <a:ext uri="{C572A759-6A51-4108-AA02-DFA0A04FC94B}">
-              <ma14:wrappingTextBoxFlag xmlns:ma14="http://schemas.microsoft.com/office/mac/drawingml/2011/main" val="0"/>
+              <ma14:wrappingTextBoxFlag xmlns:ma14="http://schemas.microsoft.com/office/mac/drawingml/2011/main" xmlns="" val="0"/>
             </a:ext>
           </a:extLst>
         </p:spPr>
@@ -6522,7 +6470,7 @@
           <a:p>
             <a:pPr algn="r"/>
             <a:fld id="{F7021451-1387-4CA6-816F-3879F97B5CBC}" type="slidenum">
-              <a:rPr b="0" lang="en-US"/>
+              <a:rPr lang="en-US" b="0"/>
               <a:t>18</a:t>
             </a:fld>
             <a:endParaRPr lang="en-US"/>
@@ -6575,7 +6523,7 @@
           <a:bodyPr wrap="square" lIns="0" tIns="0" rIns="0" bIns="0" rtlCol="0" anchor="ctr"/>
           <a:lstStyle/>
           <a:p>
-            <a:pPr indent="0" marL="0">
+            <a:pPr marL="0" indent="0">
               <a:buNone/>
             </a:pPr>
             <a:r>
@@ -6614,7 +6562,7 @@
           <a:bodyPr wrap="square" lIns="0" tIns="0" rIns="0" bIns="0" rtlCol="0" anchor="ctr"/>
           <a:lstStyle/>
           <a:p>
-            <a:pPr indent="0" marL="0">
+            <a:pPr marL="0" indent="0">
               <a:buNone/>
             </a:pPr>
             <a:r>
@@ -6658,6 +6606,13 @@
             <a:prstDash val="solid"/>
           </a:ln>
         </p:spPr>
+        <p:txBody>
+          <a:bodyPr/>
+          <a:lstStyle/>
+          <a:p>
+            <a:endParaRPr lang="en-US"/>
+          </a:p>
+        </p:txBody>
       </p:sp>
       <p:sp>
         <p:nvSpPr>
@@ -6683,6 +6638,13 @@
             <a:prstDash val="solid"/>
           </a:ln>
         </p:spPr>
+        <p:txBody>
+          <a:bodyPr/>
+          <a:lstStyle/>
+          <a:p>
+            <a:endParaRPr lang="en-US"/>
+          </a:p>
+        </p:txBody>
       </p:sp>
       <p:sp>
         <p:nvSpPr>
@@ -6705,7 +6667,7 @@
           <a:bodyPr wrap="square" lIns="0" tIns="0" rIns="0" bIns="0" rtlCol="0" anchor="ctr"/>
           <a:lstStyle/>
           <a:p>
-            <a:pPr indent="0" marL="0">
+            <a:pPr marL="0" indent="0">
               <a:buNone/>
             </a:pPr>
             <a:r>
@@ -6746,7 +6708,7 @@
           </a:bodyPr>
           <a:lstStyle/>
           <a:p>
-            <a:pPr indent="0" marL="0">
+            <a:pPr marL="0" indent="0">
               <a:buNone/>
             </a:pPr>
             <a:r>
@@ -6790,6 +6752,13 @@
             <a:prstDash val="solid"/>
           </a:ln>
         </p:spPr>
+        <p:txBody>
+          <a:bodyPr/>
+          <a:lstStyle/>
+          <a:p>
+            <a:endParaRPr lang="en-US"/>
+          </a:p>
+        </p:txBody>
       </p:sp>
       <p:sp>
         <p:nvSpPr>
@@ -6815,6 +6784,13 @@
             <a:prstDash val="solid"/>
           </a:ln>
         </p:spPr>
+        <p:txBody>
+          <a:bodyPr/>
+          <a:lstStyle/>
+          <a:p>
+            <a:endParaRPr lang="en-US"/>
+          </a:p>
+        </p:txBody>
       </p:sp>
       <p:sp>
         <p:nvSpPr>
@@ -6837,7 +6813,7 @@
           <a:bodyPr wrap="square" lIns="0" tIns="0" rIns="0" bIns="0" rtlCol="0" anchor="ctr"/>
           <a:lstStyle/>
           <a:p>
-            <a:pPr indent="0" marL="0">
+            <a:pPr marL="0" indent="0">
               <a:buNone/>
             </a:pPr>
             <a:r>
@@ -6878,7 +6854,7 @@
           </a:bodyPr>
           <a:lstStyle/>
           <a:p>
-            <a:pPr indent="0" marL="0">
+            <a:pPr marL="0" indent="0">
               <a:buNone/>
             </a:pPr>
             <a:r>
@@ -6922,6 +6898,13 @@
             <a:prstDash val="solid"/>
           </a:ln>
         </p:spPr>
+        <p:txBody>
+          <a:bodyPr/>
+          <a:lstStyle/>
+          <a:p>
+            <a:endParaRPr lang="en-US"/>
+          </a:p>
+        </p:txBody>
       </p:sp>
       <p:sp>
         <p:nvSpPr>
@@ -6947,6 +6930,13 @@
             <a:prstDash val="solid"/>
           </a:ln>
         </p:spPr>
+        <p:txBody>
+          <a:bodyPr/>
+          <a:lstStyle/>
+          <a:p>
+            <a:endParaRPr lang="en-US"/>
+          </a:p>
+        </p:txBody>
       </p:sp>
       <p:sp>
         <p:nvSpPr>
@@ -6969,7 +6959,7 @@
           <a:bodyPr wrap="square" lIns="0" tIns="0" rIns="0" bIns="0" rtlCol="0" anchor="ctr"/>
           <a:lstStyle/>
           <a:p>
-            <a:pPr indent="0" marL="0">
+            <a:pPr marL="0" indent="0">
               <a:buNone/>
             </a:pPr>
             <a:r>
@@ -7010,7 +7000,7 @@
           </a:bodyPr>
           <a:lstStyle/>
           <a:p>
-            <a:pPr indent="0" marL="0">
+            <a:pPr marL="0" indent="0">
               <a:buNone/>
             </a:pPr>
             <a:r>
@@ -7126,7 +7116,7 @@
           </a:prstGeom>
           <a:extLst>
             <a:ext uri="{C572A759-6A51-4108-AA02-DFA0A04FC94B}">
-              <ma14:wrappingTextBoxFlag xmlns:ma14="http://schemas.microsoft.com/office/mac/drawingml/2011/main" val="0"/>
+              <ma14:wrappingTextBoxFlag xmlns:ma14="http://schemas.microsoft.com/office/mac/drawingml/2011/main" xmlns="" val="0"/>
             </a:ext>
           </a:extLst>
         </p:spPr>
@@ -7147,7 +7137,7 @@
           <a:p>
             <a:pPr algn="r"/>
             <a:fld id="{F7021451-1387-4CA6-816F-3879F97B5CBC}" type="slidenum">
-              <a:rPr b="0" lang="en-US"/>
+              <a:rPr lang="en-US" b="0"/>
               <a:t>19</a:t>
             </a:fld>
             <a:endParaRPr lang="en-US"/>
@@ -7200,7 +7190,7 @@
           <a:bodyPr wrap="square" lIns="0" tIns="0" rIns="0" bIns="0" rtlCol="0" anchor="ctr"/>
           <a:lstStyle/>
           <a:p>
-            <a:pPr indent="0" marL="0">
+            <a:pPr marL="0" indent="0">
               <a:buNone/>
             </a:pPr>
             <a:r>
@@ -7239,7 +7229,7 @@
           <a:bodyPr wrap="square" lIns="0" tIns="0" rIns="0" bIns="0" rtlCol="0" anchor="ctr"/>
           <a:lstStyle/>
           <a:p>
-            <a:pPr indent="0" marL="0">
+            <a:pPr marL="0" indent="0">
               <a:buNone/>
             </a:pPr>
             <a:r>
@@ -7397,6 +7387,13 @@
             <a:prstDash val="solid"/>
           </a:ln>
         </p:spPr>
+        <p:txBody>
+          <a:bodyPr/>
+          <a:lstStyle/>
+          <a:p>
+            <a:endParaRPr lang="en-US"/>
+          </a:p>
+        </p:txBody>
       </p:sp>
       <p:sp>
         <p:nvSpPr>
@@ -7422,6 +7419,13 @@
             <a:prstDash val="solid"/>
           </a:ln>
         </p:spPr>
+        <p:txBody>
+          <a:bodyPr/>
+          <a:lstStyle/>
+          <a:p>
+            <a:endParaRPr lang="en-US"/>
+          </a:p>
+        </p:txBody>
       </p:sp>
       <p:sp>
         <p:nvSpPr>
@@ -7444,7 +7448,7 @@
           <a:bodyPr wrap="square" lIns="0" tIns="0" rIns="0" bIns="0" rtlCol="0" anchor="ctr"/>
           <a:lstStyle/>
           <a:p>
-            <a:pPr indent="0" marL="0">
+            <a:pPr marL="0" indent="0">
               <a:buNone/>
             </a:pPr>
             <a:r>
@@ -7485,7 +7489,7 @@
           </a:bodyPr>
           <a:lstStyle/>
           <a:p>
-            <a:pPr indent="0" marL="0">
+            <a:pPr marL="0" indent="0">
               <a:buNone/>
             </a:pPr>
             <a:r>
@@ -7529,6 +7533,13 @@
             <a:prstDash val="solid"/>
           </a:ln>
         </p:spPr>
+        <p:txBody>
+          <a:bodyPr/>
+          <a:lstStyle/>
+          <a:p>
+            <a:endParaRPr lang="en-US"/>
+          </a:p>
+        </p:txBody>
       </p:sp>
       <p:sp>
         <p:nvSpPr>
@@ -7554,6 +7565,13 @@
             <a:prstDash val="solid"/>
           </a:ln>
         </p:spPr>
+        <p:txBody>
+          <a:bodyPr/>
+          <a:lstStyle/>
+          <a:p>
+            <a:endParaRPr lang="en-US"/>
+          </a:p>
+        </p:txBody>
       </p:sp>
       <p:sp>
         <p:nvSpPr>
@@ -7576,7 +7594,7 @@
           <a:bodyPr wrap="square" lIns="0" tIns="0" rIns="0" bIns="0" rtlCol="0" anchor="ctr"/>
           <a:lstStyle/>
           <a:p>
-            <a:pPr indent="0" marL="0">
+            <a:pPr marL="0" indent="0">
               <a:buNone/>
             </a:pPr>
             <a:r>
@@ -7617,7 +7635,7 @@
           </a:bodyPr>
           <a:lstStyle/>
           <a:p>
-            <a:pPr indent="0" marL="0">
+            <a:pPr marL="0" indent="0">
               <a:buNone/>
             </a:pPr>
             <a:r>
@@ -7661,6 +7679,13 @@
             <a:prstDash val="solid"/>
           </a:ln>
         </p:spPr>
+        <p:txBody>
+          <a:bodyPr/>
+          <a:lstStyle/>
+          <a:p>
+            <a:endParaRPr lang="en-US"/>
+          </a:p>
+        </p:txBody>
       </p:sp>
       <p:sp>
         <p:nvSpPr>
@@ -7686,6 +7711,13 @@
             <a:prstDash val="solid"/>
           </a:ln>
         </p:spPr>
+        <p:txBody>
+          <a:bodyPr/>
+          <a:lstStyle/>
+          <a:p>
+            <a:endParaRPr lang="en-US"/>
+          </a:p>
+        </p:txBody>
       </p:sp>
       <p:sp>
         <p:nvSpPr>
@@ -7708,7 +7740,7 @@
           <a:bodyPr wrap="square" lIns="0" tIns="0" rIns="0" bIns="0" rtlCol="0" anchor="ctr"/>
           <a:lstStyle/>
           <a:p>
-            <a:pPr indent="0" marL="0">
+            <a:pPr marL="0" indent="0">
               <a:buNone/>
             </a:pPr>
             <a:r>
@@ -7749,7 +7781,7 @@
           </a:bodyPr>
           <a:lstStyle/>
           <a:p>
-            <a:pPr indent="0" marL="0">
+            <a:pPr marL="0" indent="0">
               <a:buNone/>
             </a:pPr>
             <a:r>
@@ -7793,6 +7825,13 @@
             <a:prstDash val="solid"/>
           </a:ln>
         </p:spPr>
+        <p:txBody>
+          <a:bodyPr/>
+          <a:lstStyle/>
+          <a:p>
+            <a:endParaRPr lang="en-US"/>
+          </a:p>
+        </p:txBody>
       </p:sp>
       <p:sp>
         <p:nvSpPr>
@@ -7818,6 +7857,13 @@
             <a:prstDash val="solid"/>
           </a:ln>
         </p:spPr>
+        <p:txBody>
+          <a:bodyPr/>
+          <a:lstStyle/>
+          <a:p>
+            <a:endParaRPr lang="en-US"/>
+          </a:p>
+        </p:txBody>
       </p:sp>
       <p:sp>
         <p:nvSpPr>
@@ -7840,7 +7886,7 @@
           <a:bodyPr wrap="square" lIns="0" tIns="0" rIns="0" bIns="0" rtlCol="0" anchor="ctr"/>
           <a:lstStyle/>
           <a:p>
-            <a:pPr indent="0" marL="0">
+            <a:pPr marL="0" indent="0">
               <a:buNone/>
             </a:pPr>
             <a:r>
@@ -7877,11 +7923,11 @@
         </p:spPr>
         <p:txBody>
           <a:bodyPr wrap="square" lIns="0" tIns="0" rIns="0" bIns="0" rtlCol="0" anchor="t">
-            <a:normAutofit/>
+            <a:normAutofit fontScale="92500" lnSpcReduction="20000"/>
           </a:bodyPr>
           <a:lstStyle/>
           <a:p>
-            <a:pPr indent="0" marL="0">
+            <a:pPr marL="0" indent="0">
               <a:buNone/>
             </a:pPr>
             <a:r>
@@ -7919,7 +7965,7 @@
           </a:prstGeom>
           <a:extLst>
             <a:ext uri="{C572A759-6A51-4108-AA02-DFA0A04FC94B}">
-              <ma14:wrappingTextBoxFlag xmlns:ma14="http://schemas.microsoft.com/office/mac/drawingml/2011/main" val="0"/>
+              <ma14:wrappingTextBoxFlag xmlns:ma14="http://schemas.microsoft.com/office/mac/drawingml/2011/main" xmlns="" val="0"/>
             </a:ext>
           </a:extLst>
         </p:spPr>
@@ -7940,7 +7986,7 @@
           <a:p>
             <a:pPr algn="r"/>
             <a:fld id="{F7021451-1387-4CA6-816F-3879F97B5CBC}" type="slidenum">
-              <a:rPr b="0" lang="en-US"/>
+              <a:rPr lang="en-US" b="0"/>
               <a:t>2</a:t>
             </a:fld>
             <a:endParaRPr lang="en-US"/>
@@ -7993,7 +8039,7 @@
           <a:bodyPr wrap="square" lIns="0" tIns="0" rIns="0" bIns="0" rtlCol="0" anchor="ctr"/>
           <a:lstStyle/>
           <a:p>
-            <a:pPr indent="0" marL="0">
+            <a:pPr marL="0" indent="0">
               <a:buNone/>
             </a:pPr>
             <a:r>
@@ -8032,7 +8078,7 @@
           <a:bodyPr wrap="square" lIns="0" tIns="0" rIns="0" bIns="0" rtlCol="0" anchor="ctr"/>
           <a:lstStyle/>
           <a:p>
-            <a:pPr indent="0" marL="0">
+            <a:pPr marL="0" indent="0">
               <a:buNone/>
             </a:pPr>
             <a:r>
@@ -8208,6 +8254,13 @@
             <a:prstDash val="solid"/>
           </a:ln>
         </p:spPr>
+        <p:txBody>
+          <a:bodyPr/>
+          <a:lstStyle/>
+          <a:p>
+            <a:endParaRPr lang="en-US"/>
+          </a:p>
+        </p:txBody>
       </p:sp>
       <p:sp>
         <p:nvSpPr>
@@ -8233,6 +8286,13 @@
             <a:prstDash val="solid"/>
           </a:ln>
         </p:spPr>
+        <p:txBody>
+          <a:bodyPr/>
+          <a:lstStyle/>
+          <a:p>
+            <a:endParaRPr lang="en-US"/>
+          </a:p>
+        </p:txBody>
       </p:sp>
       <p:sp>
         <p:nvSpPr>
@@ -8255,7 +8315,7 @@
           <a:bodyPr wrap="square" lIns="0" tIns="0" rIns="0" bIns="0" rtlCol="0" anchor="ctr"/>
           <a:lstStyle/>
           <a:p>
-            <a:pPr indent="0" marL="0">
+            <a:pPr marL="0" indent="0">
               <a:buNone/>
             </a:pPr>
             <a:r>
@@ -8296,7 +8356,7 @@
           </a:bodyPr>
           <a:lstStyle/>
           <a:p>
-            <a:pPr indent="0" marL="0">
+            <a:pPr marL="0" indent="0">
               <a:buNone/>
             </a:pPr>
             <a:r>
@@ -8340,6 +8400,13 @@
             <a:prstDash val="solid"/>
           </a:ln>
         </p:spPr>
+        <p:txBody>
+          <a:bodyPr/>
+          <a:lstStyle/>
+          <a:p>
+            <a:endParaRPr lang="en-US"/>
+          </a:p>
+        </p:txBody>
       </p:sp>
       <p:sp>
         <p:nvSpPr>
@@ -8365,6 +8432,13 @@
             <a:prstDash val="solid"/>
           </a:ln>
         </p:spPr>
+        <p:txBody>
+          <a:bodyPr/>
+          <a:lstStyle/>
+          <a:p>
+            <a:endParaRPr lang="en-US"/>
+          </a:p>
+        </p:txBody>
       </p:sp>
       <p:sp>
         <p:nvSpPr>
@@ -8387,7 +8461,7 @@
           <a:bodyPr wrap="square" lIns="0" tIns="0" rIns="0" bIns="0" rtlCol="0" anchor="ctr"/>
           <a:lstStyle/>
           <a:p>
-            <a:pPr indent="0" marL="0">
+            <a:pPr marL="0" indent="0">
               <a:buNone/>
             </a:pPr>
             <a:r>
@@ -8428,7 +8502,7 @@
           </a:bodyPr>
           <a:lstStyle/>
           <a:p>
-            <a:pPr indent="0" marL="0">
+            <a:pPr marL="0" indent="0">
               <a:buNone/>
             </a:pPr>
             <a:r>
@@ -8466,7 +8540,7 @@
           </a:prstGeom>
           <a:extLst>
             <a:ext uri="{C572A759-6A51-4108-AA02-DFA0A04FC94B}">
-              <ma14:wrappingTextBoxFlag xmlns:ma14="http://schemas.microsoft.com/office/mac/drawingml/2011/main" val="0"/>
+              <ma14:wrappingTextBoxFlag xmlns:ma14="http://schemas.microsoft.com/office/mac/drawingml/2011/main" xmlns="" val="0"/>
             </a:ext>
           </a:extLst>
         </p:spPr>
@@ -8487,7 +8561,7 @@
           <a:p>
             <a:pPr algn="r"/>
             <a:fld id="{F7021451-1387-4CA6-816F-3879F97B5CBC}" type="slidenum">
-              <a:rPr b="0" lang="en-US"/>
+              <a:rPr lang="en-US" b="0"/>
               <a:t>20</a:t>
             </a:fld>
             <a:endParaRPr lang="en-US"/>
@@ -8540,7 +8614,7 @@
           <a:bodyPr wrap="square" lIns="0" tIns="0" rIns="0" bIns="0" rtlCol="0" anchor="ctr"/>
           <a:lstStyle/>
           <a:p>
-            <a:pPr indent="0" marL="0">
+            <a:pPr marL="0" indent="0">
               <a:buNone/>
             </a:pPr>
             <a:r>
@@ -8674,7 +8748,7 @@
           </a:prstGeom>
           <a:extLst>
             <a:ext uri="{C572A759-6A51-4108-AA02-DFA0A04FC94B}">
-              <ma14:wrappingTextBoxFlag xmlns:ma14="http://schemas.microsoft.com/office/mac/drawingml/2011/main" val="0"/>
+              <ma14:wrappingTextBoxFlag xmlns:ma14="http://schemas.microsoft.com/office/mac/drawingml/2011/main" xmlns="" val="0"/>
             </a:ext>
           </a:extLst>
         </p:spPr>
@@ -8695,7 +8769,7 @@
           <a:p>
             <a:pPr algn="r"/>
             <a:fld id="{F7021451-1387-4CA6-816F-3879F97B5CBC}" type="slidenum">
-              <a:rPr b="0" lang="en-US"/>
+              <a:rPr lang="en-US" b="0"/>
               <a:t>21</a:t>
             </a:fld>
             <a:endParaRPr lang="en-US"/>
@@ -8718,6 +8792,7 @@
         <a:solidFill>
           <a:srgbClr val="17324D"/>
         </a:solidFill>
+        <a:effectLst/>
       </p:bgPr>
     </p:bg>
     <p:spTree>
@@ -8755,7 +8830,7 @@
           <a:bodyPr wrap="square" lIns="0" tIns="0" rIns="0" bIns="0" rtlCol="0" anchor="ctr"/>
           <a:lstStyle/>
           <a:p>
-            <a:pPr indent="0" marL="0">
+            <a:pPr marL="0" indent="0">
               <a:buNone/>
             </a:pPr>
             <a:r>
@@ -8794,7 +8869,7 @@
           <a:bodyPr wrap="square" lIns="0" tIns="0" rIns="0" bIns="0" rtlCol="0" anchor="ctr"/>
           <a:lstStyle/>
           <a:p>
-            <a:pPr indent="0" marL="0">
+            <a:pPr marL="0" indent="0">
               <a:buNone/>
             </a:pPr>
             <a:r>
@@ -8833,7 +8908,7 @@
           <a:bodyPr wrap="square" lIns="0" tIns="0" rIns="0" bIns="0" rtlCol="0" anchor="ctr"/>
           <a:lstStyle/>
           <a:p>
-            <a:pPr indent="0" marL="0">
+            <a:pPr marL="0" indent="0">
               <a:buNone/>
             </a:pPr>
             <a:r>
@@ -8871,7 +8946,7 @@
           </a:prstGeom>
           <a:extLst>
             <a:ext uri="{C572A759-6A51-4108-AA02-DFA0A04FC94B}">
-              <ma14:wrappingTextBoxFlag xmlns:ma14="http://schemas.microsoft.com/office/mac/drawingml/2011/main" val="0"/>
+              <ma14:wrappingTextBoxFlag xmlns:ma14="http://schemas.microsoft.com/office/mac/drawingml/2011/main" xmlns="" val="0"/>
             </a:ext>
           </a:extLst>
         </p:spPr>
@@ -8892,7 +8967,7 @@
           <a:p>
             <a:pPr algn="r"/>
             <a:fld id="{F7021451-1387-4CA6-816F-3879F97B5CBC}" type="slidenum">
-              <a:rPr b="0" lang="en-US"/>
+              <a:rPr lang="en-US" b="0"/>
               <a:t>3</a:t>
             </a:fld>
             <a:endParaRPr lang="en-US"/>
@@ -8945,7 +9020,7 @@
           <a:bodyPr wrap="square" lIns="0" tIns="0" rIns="0" bIns="0" rtlCol="0" anchor="ctr"/>
           <a:lstStyle/>
           <a:p>
-            <a:pPr indent="0" marL="0">
+            <a:pPr marL="0" indent="0">
               <a:buNone/>
             </a:pPr>
             <a:r>
@@ -8984,7 +9059,7 @@
           <a:bodyPr wrap="square" lIns="0" tIns="0" rIns="0" bIns="0" rtlCol="0" anchor="ctr"/>
           <a:lstStyle/>
           <a:p>
-            <a:pPr indent="0" marL="0">
+            <a:pPr marL="0" indent="0">
               <a:buNone/>
             </a:pPr>
             <a:r>
@@ -9026,6 +9101,13 @@
             <a:prstDash val="solid"/>
           </a:ln>
         </p:spPr>
+        <p:txBody>
+          <a:bodyPr/>
+          <a:lstStyle/>
+          <a:p>
+            <a:endParaRPr lang="en-US"/>
+          </a:p>
+        </p:txBody>
       </p:sp>
       <p:sp>
         <p:nvSpPr>
@@ -9050,7 +9132,7 @@
           </a:bodyPr>
           <a:lstStyle/>
           <a:p>
-            <a:pPr algn="ctr" indent="0" marL="0">
+            <a:pPr marL="0" indent="0" algn="ctr">
               <a:buNone/>
             </a:pPr>
             <a:r>
@@ -9092,6 +9174,13 @@
             <a:prstDash val="solid"/>
           </a:ln>
         </p:spPr>
+        <p:txBody>
+          <a:bodyPr/>
+          <a:lstStyle/>
+          <a:p>
+            <a:endParaRPr lang="en-US"/>
+          </a:p>
+        </p:txBody>
       </p:sp>
       <p:sp>
         <p:nvSpPr>
@@ -9116,7 +9205,7 @@
           </a:bodyPr>
           <a:lstStyle/>
           <a:p>
-            <a:pPr algn="ctr" indent="0" marL="0">
+            <a:pPr marL="0" indent="0" algn="ctr">
               <a:buNone/>
             </a:pPr>
             <a:r>
@@ -9160,6 +9249,13 @@
             <a:prstDash val="solid"/>
           </a:ln>
         </p:spPr>
+        <p:txBody>
+          <a:bodyPr/>
+          <a:lstStyle/>
+          <a:p>
+            <a:endParaRPr lang="en-US"/>
+          </a:p>
+        </p:txBody>
       </p:sp>
       <p:sp>
         <p:nvSpPr>
@@ -9185,6 +9281,13 @@
             <a:prstDash val="solid"/>
           </a:ln>
         </p:spPr>
+        <p:txBody>
+          <a:bodyPr/>
+          <a:lstStyle/>
+          <a:p>
+            <a:endParaRPr lang="en-US"/>
+          </a:p>
+        </p:txBody>
       </p:sp>
       <p:sp>
         <p:nvSpPr>
@@ -9207,7 +9310,7 @@
           <a:bodyPr wrap="square" lIns="0" tIns="0" rIns="0" bIns="0" rtlCol="0" anchor="ctr"/>
           <a:lstStyle/>
           <a:p>
-            <a:pPr indent="0" marL="0">
+            <a:pPr marL="0" indent="0">
               <a:buNone/>
             </a:pPr>
             <a:r>
@@ -9248,7 +9351,7 @@
           </a:bodyPr>
           <a:lstStyle/>
           <a:p>
-            <a:pPr indent="0" marL="0">
+            <a:pPr marL="0" indent="0">
               <a:buNone/>
             </a:pPr>
             <a:r>
@@ -9292,6 +9395,13 @@
             <a:prstDash val="solid"/>
           </a:ln>
         </p:spPr>
+        <p:txBody>
+          <a:bodyPr/>
+          <a:lstStyle/>
+          <a:p>
+            <a:endParaRPr lang="en-US"/>
+          </a:p>
+        </p:txBody>
       </p:sp>
       <p:sp>
         <p:nvSpPr>
@@ -9317,6 +9427,13 @@
             <a:prstDash val="solid"/>
           </a:ln>
         </p:spPr>
+        <p:txBody>
+          <a:bodyPr/>
+          <a:lstStyle/>
+          <a:p>
+            <a:endParaRPr lang="en-US"/>
+          </a:p>
+        </p:txBody>
       </p:sp>
       <p:sp>
         <p:nvSpPr>
@@ -9339,7 +9456,7 @@
           <a:bodyPr wrap="square" lIns="0" tIns="0" rIns="0" bIns="0" rtlCol="0" anchor="ctr"/>
           <a:lstStyle/>
           <a:p>
-            <a:pPr indent="0" marL="0">
+            <a:pPr marL="0" indent="0">
               <a:buNone/>
             </a:pPr>
             <a:r>
@@ -9380,7 +9497,7 @@
           </a:bodyPr>
           <a:lstStyle/>
           <a:p>
-            <a:pPr indent="0" marL="0">
+            <a:pPr marL="0" indent="0">
               <a:buNone/>
             </a:pPr>
             <a:r>
@@ -9424,6 +9541,13 @@
             <a:prstDash val="solid"/>
           </a:ln>
         </p:spPr>
+        <p:txBody>
+          <a:bodyPr/>
+          <a:lstStyle/>
+          <a:p>
+            <a:endParaRPr lang="en-US"/>
+          </a:p>
+        </p:txBody>
       </p:sp>
       <p:sp>
         <p:nvSpPr>
@@ -9449,6 +9573,13 @@
             <a:prstDash val="solid"/>
           </a:ln>
         </p:spPr>
+        <p:txBody>
+          <a:bodyPr/>
+          <a:lstStyle/>
+          <a:p>
+            <a:endParaRPr lang="en-US"/>
+          </a:p>
+        </p:txBody>
       </p:sp>
       <p:sp>
         <p:nvSpPr>
@@ -9471,7 +9602,7 @@
           <a:bodyPr wrap="square" lIns="0" tIns="0" rIns="0" bIns="0" rtlCol="0" anchor="ctr"/>
           <a:lstStyle/>
           <a:p>
-            <a:pPr indent="0" marL="0">
+            <a:pPr marL="0" indent="0">
               <a:buNone/>
             </a:pPr>
             <a:r>
@@ -9512,7 +9643,7 @@
           </a:bodyPr>
           <a:lstStyle/>
           <a:p>
-            <a:pPr indent="0" marL="0">
+            <a:pPr marL="0" indent="0">
               <a:buNone/>
             </a:pPr>
             <a:r>
@@ -9550,7 +9681,7 @@
           </a:prstGeom>
           <a:extLst>
             <a:ext uri="{C572A759-6A51-4108-AA02-DFA0A04FC94B}">
-              <ma14:wrappingTextBoxFlag xmlns:ma14="http://schemas.microsoft.com/office/mac/drawingml/2011/main" val="0"/>
+              <ma14:wrappingTextBoxFlag xmlns:ma14="http://schemas.microsoft.com/office/mac/drawingml/2011/main" xmlns="" val="0"/>
             </a:ext>
           </a:extLst>
         </p:spPr>
@@ -9571,7 +9702,7 @@
           <a:p>
             <a:pPr algn="r"/>
             <a:fld id="{F7021451-1387-4CA6-816F-3879F97B5CBC}" type="slidenum">
-              <a:rPr b="0" lang="en-US"/>
+              <a:rPr lang="en-US" b="0"/>
               <a:t>4</a:t>
             </a:fld>
             <a:endParaRPr lang="en-US"/>
@@ -9627,6 +9758,13 @@
             <a:prstDash val="solid"/>
           </a:ln>
         </p:spPr>
+        <p:txBody>
+          <a:bodyPr/>
+          <a:lstStyle/>
+          <a:p>
+            <a:endParaRPr lang="en-US"/>
+          </a:p>
+        </p:txBody>
       </p:sp>
       <p:sp>
         <p:nvSpPr>
@@ -9649,7 +9787,7 @@
           <a:bodyPr wrap="square" lIns="0" tIns="0" rIns="0" bIns="0" rtlCol="0" anchor="ctr"/>
           <a:lstStyle/>
           <a:p>
-            <a:pPr indent="0" marL="0">
+            <a:pPr marL="0" indent="0">
               <a:buNone/>
             </a:pPr>
             <a:r>
@@ -9690,7 +9828,7 @@
           </a:bodyPr>
           <a:lstStyle/>
           <a:p>
-            <a:pPr indent="0" marL="0">
+            <a:pPr marL="0" indent="0">
               <a:buNone/>
             </a:pPr>
             <a:r>
@@ -9729,7 +9867,7 @@
           <a:bodyPr wrap="square" lIns="0" tIns="0" rIns="0" bIns="0" rtlCol="0" anchor="ctr"/>
           <a:lstStyle/>
           <a:p>
-            <a:pPr indent="0" marL="0">
+            <a:pPr marL="0" indent="0">
               <a:buNone/>
             </a:pPr>
             <a:r>
@@ -9770,7 +9908,7 @@
           </a:bodyPr>
           <a:lstStyle/>
           <a:p>
-            <a:pPr indent="0" marL="0">
+            <a:pPr marL="0" indent="0">
               <a:buNone/>
             </a:pPr>
             <a:r>
@@ -9808,7 +9946,7 @@
           </a:prstGeom>
           <a:extLst>
             <a:ext uri="{C572A759-6A51-4108-AA02-DFA0A04FC94B}">
-              <ma14:wrappingTextBoxFlag xmlns:ma14="http://schemas.microsoft.com/office/mac/drawingml/2011/main" val="0"/>
+              <ma14:wrappingTextBoxFlag xmlns:ma14="http://schemas.microsoft.com/office/mac/drawingml/2011/main" xmlns="" val="0"/>
             </a:ext>
           </a:extLst>
         </p:spPr>
@@ -9829,7 +9967,7 @@
           <a:p>
             <a:pPr algn="r"/>
             <a:fld id="{F7021451-1387-4CA6-816F-3879F97B5CBC}" type="slidenum">
-              <a:rPr b="0" lang="en-US"/>
+              <a:rPr lang="en-US" b="0"/>
               <a:t>5</a:t>
             </a:fld>
             <a:endParaRPr lang="en-US"/>
@@ -9882,7 +10020,7 @@
           <a:bodyPr wrap="square" lIns="0" tIns="0" rIns="0" bIns="0" rtlCol="0" anchor="ctr"/>
           <a:lstStyle/>
           <a:p>
-            <a:pPr indent="0" marL="0">
+            <a:pPr marL="0" indent="0">
               <a:buNone/>
             </a:pPr>
             <a:r>
@@ -9921,7 +10059,7 @@
           <a:bodyPr wrap="square" lIns="0" tIns="0" rIns="0" bIns="0" rtlCol="0" anchor="ctr"/>
           <a:lstStyle/>
           <a:p>
-            <a:pPr indent="0" marL="0">
+            <a:pPr marL="0" indent="0">
               <a:buNone/>
             </a:pPr>
             <a:r>
@@ -9963,6 +10101,13 @@
             <a:prstDash val="solid"/>
           </a:ln>
         </p:spPr>
+        <p:txBody>
+          <a:bodyPr/>
+          <a:lstStyle/>
+          <a:p>
+            <a:endParaRPr lang="en-US"/>
+          </a:p>
+        </p:txBody>
       </p:sp>
       <p:sp>
         <p:nvSpPr>
@@ -9987,7 +10132,7 @@
           </a:bodyPr>
           <a:lstStyle/>
           <a:p>
-            <a:pPr algn="ctr" indent="0" marL="0">
+            <a:pPr marL="0" indent="0" algn="ctr">
               <a:buNone/>
             </a:pPr>
             <a:r>
@@ -10029,6 +10174,13 @@
             <a:prstDash val="solid"/>
           </a:ln>
         </p:spPr>
+        <p:txBody>
+          <a:bodyPr/>
+          <a:lstStyle/>
+          <a:p>
+            <a:endParaRPr lang="en-US"/>
+          </a:p>
+        </p:txBody>
       </p:sp>
       <p:sp>
         <p:nvSpPr>
@@ -10053,7 +10205,7 @@
           </a:bodyPr>
           <a:lstStyle/>
           <a:p>
-            <a:pPr algn="ctr" indent="0" marL="0">
+            <a:pPr marL="0" indent="0" algn="ctr">
               <a:buNone/>
             </a:pPr>
             <a:r>
@@ -10175,6 +10327,13 @@
             <a:prstDash val="solid"/>
           </a:ln>
         </p:spPr>
+        <p:txBody>
+          <a:bodyPr/>
+          <a:lstStyle/>
+          <a:p>
+            <a:endParaRPr lang="en-US"/>
+          </a:p>
+        </p:txBody>
       </p:sp>
       <p:sp>
         <p:nvSpPr>
@@ -10200,6 +10359,13 @@
             <a:prstDash val="solid"/>
           </a:ln>
         </p:spPr>
+        <p:txBody>
+          <a:bodyPr/>
+          <a:lstStyle/>
+          <a:p>
+            <a:endParaRPr lang="en-US"/>
+          </a:p>
+        </p:txBody>
       </p:sp>
       <p:sp>
         <p:nvSpPr>
@@ -10222,7 +10388,7 @@
           <a:bodyPr wrap="square" lIns="0" tIns="0" rIns="0" bIns="0" rtlCol="0" anchor="ctr"/>
           <a:lstStyle/>
           <a:p>
-            <a:pPr indent="0" marL="0">
+            <a:pPr marL="0" indent="0">
               <a:buNone/>
             </a:pPr>
             <a:r>
@@ -10263,7 +10429,7 @@
           </a:bodyPr>
           <a:lstStyle/>
           <a:p>
-            <a:pPr indent="0" marL="0">
+            <a:pPr marL="0" indent="0">
               <a:buNone/>
             </a:pPr>
             <a:r>
@@ -10301,7 +10467,7 @@
           </a:prstGeom>
           <a:extLst>
             <a:ext uri="{C572A759-6A51-4108-AA02-DFA0A04FC94B}">
-              <ma14:wrappingTextBoxFlag xmlns:ma14="http://schemas.microsoft.com/office/mac/drawingml/2011/main" val="0"/>
+              <ma14:wrappingTextBoxFlag xmlns:ma14="http://schemas.microsoft.com/office/mac/drawingml/2011/main" xmlns="" val="0"/>
             </a:ext>
           </a:extLst>
         </p:spPr>
@@ -10322,7 +10488,7 @@
           <a:p>
             <a:pPr algn="r"/>
             <a:fld id="{F7021451-1387-4CA6-816F-3879F97B5CBC}" type="slidenum">
-              <a:rPr b="0" lang="en-US"/>
+              <a:rPr lang="en-US" b="0"/>
               <a:t>6</a:t>
             </a:fld>
             <a:endParaRPr lang="en-US"/>
@@ -10345,6 +10511,7 @@
         <a:solidFill>
           <a:srgbClr val="17324D"/>
         </a:solidFill>
+        <a:effectLst/>
       </p:bgPr>
     </p:bg>
     <p:spTree>
@@ -10382,7 +10549,7 @@
           <a:bodyPr wrap="square" lIns="0" tIns="0" rIns="0" bIns="0" rtlCol="0" anchor="ctr"/>
           <a:lstStyle/>
           <a:p>
-            <a:pPr indent="0" marL="0">
+            <a:pPr marL="0" indent="0">
               <a:buNone/>
             </a:pPr>
             <a:r>
@@ -10421,7 +10588,7 @@
           <a:bodyPr wrap="square" lIns="0" tIns="0" rIns="0" bIns="0" rtlCol="0" anchor="ctr"/>
           <a:lstStyle/>
           <a:p>
-            <a:pPr indent="0" marL="0">
+            <a:pPr marL="0" indent="0">
               <a:buNone/>
             </a:pPr>
             <a:r>
@@ -10460,7 +10627,7 @@
           <a:bodyPr wrap="square" lIns="0" tIns="0" rIns="0" bIns="0" rtlCol="0" anchor="ctr"/>
           <a:lstStyle/>
           <a:p>
-            <a:pPr indent="0" marL="0">
+            <a:pPr marL="0" indent="0">
               <a:buNone/>
             </a:pPr>
             <a:r>
@@ -10498,7 +10665,7 @@
           </a:prstGeom>
           <a:extLst>
             <a:ext uri="{C572A759-6A51-4108-AA02-DFA0A04FC94B}">
-              <ma14:wrappingTextBoxFlag xmlns:ma14="http://schemas.microsoft.com/office/mac/drawingml/2011/main" val="0"/>
+              <ma14:wrappingTextBoxFlag xmlns:ma14="http://schemas.microsoft.com/office/mac/drawingml/2011/main" xmlns="" val="0"/>
             </a:ext>
           </a:extLst>
         </p:spPr>
@@ -10519,7 +10686,7 @@
           <a:p>
             <a:pPr algn="r"/>
             <a:fld id="{F7021451-1387-4CA6-816F-3879F97B5CBC}" type="slidenum">
-              <a:rPr b="0" lang="en-US"/>
+              <a:rPr lang="en-US" b="0"/>
               <a:t>7</a:t>
             </a:fld>
             <a:endParaRPr lang="en-US"/>
@@ -10572,7 +10739,7 @@
           <a:bodyPr wrap="square" lIns="0" tIns="0" rIns="0" bIns="0" rtlCol="0" anchor="ctr"/>
           <a:lstStyle/>
           <a:p>
-            <a:pPr indent="0" marL="0">
+            <a:pPr marL="0" indent="0">
               <a:buNone/>
             </a:pPr>
             <a:r>
@@ -10611,7 +10778,7 @@
           <a:bodyPr wrap="square" lIns="0" tIns="0" rIns="0" bIns="0" rtlCol="0" anchor="ctr"/>
           <a:lstStyle/>
           <a:p>
-            <a:pPr indent="0" marL="0">
+            <a:pPr marL="0" indent="0">
               <a:buNone/>
             </a:pPr>
             <a:r>
@@ -10653,6 +10820,13 @@
             <a:prstDash val="solid"/>
           </a:ln>
         </p:spPr>
+        <p:txBody>
+          <a:bodyPr/>
+          <a:lstStyle/>
+          <a:p>
+            <a:endParaRPr lang="en-US"/>
+          </a:p>
+        </p:txBody>
       </p:sp>
       <p:sp>
         <p:nvSpPr>
@@ -10677,7 +10851,7 @@
           </a:bodyPr>
           <a:lstStyle/>
           <a:p>
-            <a:pPr algn="ctr" indent="0" marL="0">
+            <a:pPr marL="0" indent="0" algn="ctr">
               <a:buNone/>
             </a:pPr>
             <a:r>
@@ -10719,6 +10893,13 @@
             <a:prstDash val="solid"/>
           </a:ln>
         </p:spPr>
+        <p:txBody>
+          <a:bodyPr/>
+          <a:lstStyle/>
+          <a:p>
+            <a:endParaRPr lang="en-US"/>
+          </a:p>
+        </p:txBody>
       </p:sp>
       <p:sp>
         <p:nvSpPr>
@@ -10743,7 +10924,7 @@
           </a:bodyPr>
           <a:lstStyle/>
           <a:p>
-            <a:pPr algn="ctr" indent="0" marL="0">
+            <a:pPr marL="0" indent="0" algn="ctr">
               <a:buNone/>
             </a:pPr>
             <a:r>
@@ -10785,6 +10966,13 @@
             <a:prstDash val="solid"/>
           </a:ln>
         </p:spPr>
+        <p:txBody>
+          <a:bodyPr/>
+          <a:lstStyle/>
+          <a:p>
+            <a:endParaRPr lang="en-US"/>
+          </a:p>
+        </p:txBody>
       </p:sp>
       <p:sp>
         <p:nvSpPr>
@@ -10809,7 +10997,7 @@
           </a:bodyPr>
           <a:lstStyle/>
           <a:p>
-            <a:pPr algn="ctr" indent="0" marL="0">
+            <a:pPr marL="0" indent="0" algn="ctr">
               <a:buNone/>
             </a:pPr>
             <a:r>
@@ -10851,6 +11039,13 @@
             <a:prstDash val="solid"/>
           </a:ln>
         </p:spPr>
+        <p:txBody>
+          <a:bodyPr/>
+          <a:lstStyle/>
+          <a:p>
+            <a:endParaRPr lang="en-US"/>
+          </a:p>
+        </p:txBody>
       </p:sp>
       <p:sp>
         <p:nvSpPr>
@@ -10875,7 +11070,7 @@
           </a:bodyPr>
           <a:lstStyle/>
           <a:p>
-            <a:pPr algn="ctr" indent="0" marL="0">
+            <a:pPr marL="0" indent="0" algn="ctr">
               <a:buNone/>
             </a:pPr>
             <a:r>
@@ -10919,6 +11114,13 @@
             <a:prstDash val="solid"/>
           </a:ln>
         </p:spPr>
+        <p:txBody>
+          <a:bodyPr/>
+          <a:lstStyle/>
+          <a:p>
+            <a:endParaRPr lang="en-US"/>
+          </a:p>
+        </p:txBody>
       </p:sp>
       <p:sp>
         <p:nvSpPr>
@@ -10944,6 +11146,13 @@
             <a:prstDash val="solid"/>
           </a:ln>
         </p:spPr>
+        <p:txBody>
+          <a:bodyPr/>
+          <a:lstStyle/>
+          <a:p>
+            <a:endParaRPr lang="en-US"/>
+          </a:p>
+        </p:txBody>
       </p:sp>
       <p:sp>
         <p:nvSpPr>
@@ -10966,7 +11175,7 @@
           <a:bodyPr wrap="square" lIns="0" tIns="0" rIns="0" bIns="0" rtlCol="0" anchor="ctr"/>
           <a:lstStyle/>
           <a:p>
-            <a:pPr indent="0" marL="0">
+            <a:pPr marL="0" indent="0">
               <a:buNone/>
             </a:pPr>
             <a:r>
@@ -11007,7 +11216,7 @@
           </a:bodyPr>
           <a:lstStyle/>
           <a:p>
-            <a:pPr indent="0" marL="0">
+            <a:pPr marL="0" indent="0">
               <a:buNone/>
             </a:pPr>
             <a:r>
@@ -11051,6 +11260,13 @@
             <a:prstDash val="solid"/>
           </a:ln>
         </p:spPr>
+        <p:txBody>
+          <a:bodyPr/>
+          <a:lstStyle/>
+          <a:p>
+            <a:endParaRPr lang="en-US"/>
+          </a:p>
+        </p:txBody>
       </p:sp>
       <p:sp>
         <p:nvSpPr>
@@ -11076,6 +11292,13 @@
             <a:prstDash val="solid"/>
           </a:ln>
         </p:spPr>
+        <p:txBody>
+          <a:bodyPr/>
+          <a:lstStyle/>
+          <a:p>
+            <a:endParaRPr lang="en-US"/>
+          </a:p>
+        </p:txBody>
       </p:sp>
       <p:sp>
         <p:nvSpPr>
@@ -11098,7 +11321,7 @@
           <a:bodyPr wrap="square" lIns="0" tIns="0" rIns="0" bIns="0" rtlCol="0" anchor="ctr"/>
           <a:lstStyle/>
           <a:p>
-            <a:pPr indent="0" marL="0">
+            <a:pPr marL="0" indent="0">
               <a:buNone/>
             </a:pPr>
             <a:r>
@@ -11139,7 +11362,7 @@
           </a:bodyPr>
           <a:lstStyle/>
           <a:p>
-            <a:pPr indent="0" marL="0">
+            <a:pPr marL="0" indent="0">
               <a:buNone/>
             </a:pPr>
             <a:r>
@@ -11177,7 +11400,7 @@
           </a:prstGeom>
           <a:extLst>
             <a:ext uri="{C572A759-6A51-4108-AA02-DFA0A04FC94B}">
-              <ma14:wrappingTextBoxFlag xmlns:ma14="http://schemas.microsoft.com/office/mac/drawingml/2011/main" val="0"/>
+              <ma14:wrappingTextBoxFlag xmlns:ma14="http://schemas.microsoft.com/office/mac/drawingml/2011/main" xmlns="" val="0"/>
             </a:ext>
           </a:extLst>
         </p:spPr>
@@ -11198,7 +11421,7 @@
           <a:p>
             <a:pPr algn="r"/>
             <a:fld id="{F7021451-1387-4CA6-816F-3879F97B5CBC}" type="slidenum">
-              <a:rPr b="0" lang="en-US"/>
+              <a:rPr lang="en-US" b="0"/>
               <a:t>8</a:t>
             </a:fld>
             <a:endParaRPr lang="en-US"/>
@@ -11251,7 +11474,7 @@
           <a:bodyPr wrap="square" lIns="0" tIns="0" rIns="0" bIns="0" rtlCol="0" anchor="ctr"/>
           <a:lstStyle/>
           <a:p>
-            <a:pPr indent="0" marL="0">
+            <a:pPr marL="0" indent="0">
               <a:buNone/>
             </a:pPr>
             <a:r>
@@ -11290,7 +11513,7 @@
           <a:bodyPr wrap="square" lIns="0" tIns="0" rIns="0" bIns="0" rtlCol="0" anchor="ctr"/>
           <a:lstStyle/>
           <a:p>
-            <a:pPr indent="0" marL="0">
+            <a:pPr marL="0" indent="0">
               <a:buNone/>
             </a:pPr>
             <a:r>
@@ -11332,6 +11555,13 @@
             <a:prstDash val="solid"/>
           </a:ln>
         </p:spPr>
+        <p:txBody>
+          <a:bodyPr/>
+          <a:lstStyle/>
+          <a:p>
+            <a:endParaRPr lang="en-US"/>
+          </a:p>
+        </p:txBody>
       </p:sp>
       <p:sp>
         <p:nvSpPr>
@@ -11356,7 +11586,7 @@
           </a:bodyPr>
           <a:lstStyle/>
           <a:p>
-            <a:pPr algn="ctr" indent="0" marL="0">
+            <a:pPr marL="0" indent="0" algn="ctr">
               <a:buNone/>
             </a:pPr>
             <a:r>
@@ -11398,6 +11628,13 @@
             <a:prstDash val="solid"/>
           </a:ln>
         </p:spPr>
+        <p:txBody>
+          <a:bodyPr/>
+          <a:lstStyle/>
+          <a:p>
+            <a:endParaRPr lang="en-US"/>
+          </a:p>
+        </p:txBody>
       </p:sp>
       <p:sp>
         <p:nvSpPr>
@@ -11422,7 +11659,7 @@
           </a:bodyPr>
           <a:lstStyle/>
           <a:p>
-            <a:pPr algn="ctr" indent="0" marL="0">
+            <a:pPr marL="0" indent="0" algn="ctr">
               <a:buNone/>
             </a:pPr>
             <a:r>
@@ -11464,6 +11701,13 @@
             <a:prstDash val="solid"/>
           </a:ln>
         </p:spPr>
+        <p:txBody>
+          <a:bodyPr/>
+          <a:lstStyle/>
+          <a:p>
+            <a:endParaRPr lang="en-US"/>
+          </a:p>
+        </p:txBody>
       </p:sp>
       <p:sp>
         <p:nvSpPr>
@@ -11488,7 +11732,7 @@
           </a:bodyPr>
           <a:lstStyle/>
           <a:p>
-            <a:pPr algn="ctr" indent="0" marL="0">
+            <a:pPr marL="0" indent="0" algn="ctr">
               <a:buNone/>
             </a:pPr>
             <a:r>
@@ -11530,6 +11774,13 @@
             <a:prstDash val="solid"/>
           </a:ln>
         </p:spPr>
+        <p:txBody>
+          <a:bodyPr/>
+          <a:lstStyle/>
+          <a:p>
+            <a:endParaRPr lang="en-US"/>
+          </a:p>
+        </p:txBody>
       </p:sp>
       <p:sp>
         <p:nvSpPr>
@@ -11554,7 +11805,7 @@
           </a:bodyPr>
           <a:lstStyle/>
           <a:p>
-            <a:pPr algn="ctr" indent="0" marL="0">
+            <a:pPr marL="0" indent="0" algn="ctr">
               <a:buNone/>
             </a:pPr>
             <a:r>
@@ -11598,6 +11849,13 @@
             <a:prstDash val="solid"/>
           </a:ln>
         </p:spPr>
+        <p:txBody>
+          <a:bodyPr/>
+          <a:lstStyle/>
+          <a:p>
+            <a:endParaRPr lang="en-US"/>
+          </a:p>
+        </p:txBody>
       </p:sp>
       <p:sp>
         <p:nvSpPr>
@@ -11623,6 +11881,13 @@
             <a:prstDash val="solid"/>
           </a:ln>
         </p:spPr>
+        <p:txBody>
+          <a:bodyPr/>
+          <a:lstStyle/>
+          <a:p>
+            <a:endParaRPr lang="en-US"/>
+          </a:p>
+        </p:txBody>
       </p:sp>
       <p:sp>
         <p:nvSpPr>
@@ -11645,7 +11910,7 @@
           <a:bodyPr wrap="square" lIns="0" tIns="0" rIns="0" bIns="0" rtlCol="0" anchor="ctr"/>
           <a:lstStyle/>
           <a:p>
-            <a:pPr indent="0" marL="0">
+            <a:pPr marL="0" indent="0">
               <a:buNone/>
             </a:pPr>
             <a:r>
@@ -11686,7 +11951,7 @@
           </a:bodyPr>
           <a:lstStyle/>
           <a:p>
-            <a:pPr indent="0" marL="0">
+            <a:pPr marL="0" indent="0">
               <a:buNone/>
             </a:pPr>
             <a:r>
@@ -11730,6 +11995,13 @@
             <a:prstDash val="solid"/>
           </a:ln>
         </p:spPr>
+        <p:txBody>
+          <a:bodyPr/>
+          <a:lstStyle/>
+          <a:p>
+            <a:endParaRPr lang="en-US"/>
+          </a:p>
+        </p:txBody>
       </p:sp>
       <p:sp>
         <p:nvSpPr>
@@ -11755,6 +12027,13 @@
             <a:prstDash val="solid"/>
           </a:ln>
         </p:spPr>
+        <p:txBody>
+          <a:bodyPr/>
+          <a:lstStyle/>
+          <a:p>
+            <a:endParaRPr lang="en-US"/>
+          </a:p>
+        </p:txBody>
       </p:sp>
       <p:sp>
         <p:nvSpPr>
@@ -11777,7 +12056,7 @@
           <a:bodyPr wrap="square" lIns="0" tIns="0" rIns="0" bIns="0" rtlCol="0" anchor="ctr"/>
           <a:lstStyle/>
           <a:p>
-            <a:pPr indent="0" marL="0">
+            <a:pPr marL="0" indent="0">
               <a:buNone/>
             </a:pPr>
             <a:r>
@@ -11818,7 +12097,7 @@
           </a:bodyPr>
           <a:lstStyle/>
           <a:p>
-            <a:pPr indent="0" marL="0">
+            <a:pPr marL="0" indent="0">
               <a:buNone/>
             </a:pPr>
             <a:r>
@@ -11862,6 +12141,13 @@
             <a:prstDash val="solid"/>
           </a:ln>
         </p:spPr>
+        <p:txBody>
+          <a:bodyPr/>
+          <a:lstStyle/>
+          <a:p>
+            <a:endParaRPr lang="en-US"/>
+          </a:p>
+        </p:txBody>
       </p:sp>
       <p:sp>
         <p:nvSpPr>
@@ -11887,6 +12173,13 @@
             <a:prstDash val="solid"/>
           </a:ln>
         </p:spPr>
+        <p:txBody>
+          <a:bodyPr/>
+          <a:lstStyle/>
+          <a:p>
+            <a:endParaRPr lang="en-US"/>
+          </a:p>
+        </p:txBody>
       </p:sp>
       <p:sp>
         <p:nvSpPr>
@@ -11909,7 +12202,7 @@
           <a:bodyPr wrap="square" lIns="0" tIns="0" rIns="0" bIns="0" rtlCol="0" anchor="ctr"/>
           <a:lstStyle/>
           <a:p>
-            <a:pPr indent="0" marL="0">
+            <a:pPr marL="0" indent="0">
               <a:buNone/>
             </a:pPr>
             <a:r>
@@ -11950,7 +12243,7 @@
           </a:bodyPr>
           <a:lstStyle/>
           <a:p>
-            <a:pPr indent="0" marL="0">
+            <a:pPr marL="0" indent="0">
               <a:buNone/>
             </a:pPr>
             <a:r>
@@ -11988,7 +12281,7 @@
           </a:prstGeom>
           <a:extLst>
             <a:ext uri="{C572A759-6A51-4108-AA02-DFA0A04FC94B}">
-              <ma14:wrappingTextBoxFlag xmlns:ma14="http://schemas.microsoft.com/office/mac/drawingml/2011/main" val="0"/>
+              <ma14:wrappingTextBoxFlag xmlns:ma14="http://schemas.microsoft.com/office/mac/drawingml/2011/main" xmlns="" val="0"/>
             </a:ext>
           </a:extLst>
         </p:spPr>
@@ -12009,7 +12302,7 @@
           <a:p>
             <a:pPr algn="r"/>
             <a:fld id="{F7021451-1387-4CA6-816F-3879F97B5CBC}" type="slidenum">
-              <a:rPr b="0" lang="en-US"/>
+              <a:rPr lang="en-US" b="0"/>
               <a:t>9</a:t>
             </a:fld>
             <a:endParaRPr lang="en-US"/>
@@ -12317,4 +12610,319 @@
     </a:ext>
   </a:extLst>
 </a:theme>
+</file>
+
+<file path=ppt/theme/theme2.xml><?xml version="1.0" encoding="utf-8"?>
+<a:theme xmlns:a="http://schemas.openxmlformats.org/drawingml/2006/main" name="Office Theme">
+  <a:themeElements>
+    <a:clrScheme name="Office">
+      <a:dk1>
+        <a:sysClr val="windowText" lastClr="000000"/>
+      </a:dk1>
+      <a:lt1>
+        <a:sysClr val="window" lastClr="FFFFFF"/>
+      </a:lt1>
+      <a:dk2>
+        <a:srgbClr val="0E2841"/>
+      </a:dk2>
+      <a:lt2>
+        <a:srgbClr val="E8E8E8"/>
+      </a:lt2>
+      <a:accent1>
+        <a:srgbClr val="156082"/>
+      </a:accent1>
+      <a:accent2>
+        <a:srgbClr val="E97132"/>
+      </a:accent2>
+      <a:accent3>
+        <a:srgbClr val="196B24"/>
+      </a:accent3>
+      <a:accent4>
+        <a:srgbClr val="0F9ED5"/>
+      </a:accent4>
+      <a:accent5>
+        <a:srgbClr val="A02B93"/>
+      </a:accent5>
+      <a:accent6>
+        <a:srgbClr val="4EA72E"/>
+      </a:accent6>
+      <a:hlink>
+        <a:srgbClr val="467886"/>
+      </a:hlink>
+      <a:folHlink>
+        <a:srgbClr val="96607D"/>
+      </a:folHlink>
+    </a:clrScheme>
+    <a:fontScheme name="Office">
+      <a:majorFont>
+        <a:latin typeface="Aptos Display" panose="02110004020202020204"/>
+        <a:ea typeface=""/>
+        <a:cs typeface=""/>
+        <a:font script="Jpan" typeface="游ゴシック Light"/>
+        <a:font script="Hang" typeface="맑은 고딕"/>
+        <a:font script="Hans" typeface="等线 Light"/>
+        <a:font script="Hant" typeface="新細明體"/>
+        <a:font script="Arab" typeface="Times New Roman"/>
+        <a:font script="Hebr" typeface="Times New Roman"/>
+        <a:font script="Thai" typeface="Angsana New"/>
+        <a:font script="Ethi" typeface="Nyala"/>
+        <a:font script="Beng" typeface="Vrinda"/>
+        <a:font script="Gujr" typeface="Shruti"/>
+        <a:font script="Khmr" typeface="MoolBoran"/>
+        <a:font script="Knda" typeface="Tunga"/>
+        <a:font script="Guru" typeface="Raavi"/>
+        <a:font script="Cans" typeface="Euphemia"/>
+        <a:font script="Cher" typeface="Plantagenet Cherokee"/>
+        <a:font script="Yiii" typeface="Microsoft Yi Baiti"/>
+        <a:font script="Tibt" typeface="Microsoft Himalaya"/>
+        <a:font script="Thaa" typeface="MV Boli"/>
+        <a:font script="Deva" typeface="Mangal"/>
+        <a:font script="Telu" typeface="Gautami"/>
+        <a:font script="Taml" typeface="Latha"/>
+        <a:font script="Syrc" typeface="Estrangelo Edessa"/>
+        <a:font script="Orya" typeface="Kalinga"/>
+        <a:font script="Mlym" typeface="Kartika"/>
+        <a:font script="Laoo" typeface="DokChampa"/>
+        <a:font script="Sinh" typeface="Iskoola Pota"/>
+        <a:font script="Mong" typeface="Mongolian Baiti"/>
+        <a:font script="Viet" typeface="Times New Roman"/>
+        <a:font script="Uigh" typeface="Microsoft Uighur"/>
+        <a:font script="Geor" typeface="Sylfaen"/>
+        <a:font script="Armn" typeface="Arial"/>
+        <a:font script="Bugi" typeface="Leelawadee UI"/>
+        <a:font script="Bopo" typeface="Microsoft JhengHei"/>
+        <a:font script="Java" typeface="Javanese Text"/>
+        <a:font script="Lisu" typeface="Segoe UI"/>
+        <a:font script="Mymr" typeface="Myanmar Text"/>
+        <a:font script="Nkoo" typeface="Ebrima"/>
+        <a:font script="Olck" typeface="Nirmala UI"/>
+        <a:font script="Osma" typeface="Ebrima"/>
+        <a:font script="Phag" typeface="Phagspa"/>
+        <a:font script="Syrn" typeface="Estrangelo Edessa"/>
+        <a:font script="Syrj" typeface="Estrangelo Edessa"/>
+        <a:font script="Syre" typeface="Estrangelo Edessa"/>
+        <a:font script="Sora" typeface="Nirmala UI"/>
+        <a:font script="Tale" typeface="Microsoft Tai Le"/>
+        <a:font script="Talu" typeface="Microsoft New Tai Lue"/>
+        <a:font script="Tfng" typeface="Ebrima"/>
+      </a:majorFont>
+      <a:minorFont>
+        <a:latin typeface="Aptos" panose="02110004020202020204"/>
+        <a:ea typeface=""/>
+        <a:cs typeface=""/>
+        <a:font script="Jpan" typeface="游ゴシック"/>
+        <a:font script="Hang" typeface="맑은 고딕"/>
+        <a:font script="Hans" typeface="等线"/>
+        <a:font script="Hant" typeface="新細明體"/>
+        <a:font script="Arab" typeface="Arial"/>
+        <a:font script="Hebr" typeface="Arial"/>
+        <a:font script="Thai" typeface="Cordia New"/>
+        <a:font script="Ethi" typeface="Nyala"/>
+        <a:font script="Beng" typeface="Vrinda"/>
+        <a:font script="Gujr" typeface="Shruti"/>
+        <a:font script="Khmr" typeface="DaunPenh"/>
+        <a:font script="Knda" typeface="Tunga"/>
+        <a:font script="Guru" typeface="Raavi"/>
+        <a:font script="Cans" typeface="Euphemia"/>
+        <a:font script="Cher" typeface="Plantagenet Cherokee"/>
+        <a:font script="Yiii" typeface="Microsoft Yi Baiti"/>
+        <a:font script="Tibt" typeface="Microsoft Himalaya"/>
+        <a:font script="Thaa" typeface="MV Boli"/>
+        <a:font script="Deva" typeface="Mangal"/>
+        <a:font script="Telu" typeface="Gautami"/>
+        <a:font script="Taml" typeface="Latha"/>
+        <a:font script="Syrc" typeface="Estrangelo Edessa"/>
+        <a:font script="Orya" typeface="Kalinga"/>
+        <a:font script="Mlym" typeface="Kartika"/>
+        <a:font script="Laoo" typeface="DokChampa"/>
+        <a:font script="Sinh" typeface="Iskoola Pota"/>
+        <a:font script="Mong" typeface="Mongolian Baiti"/>
+        <a:font script="Viet" typeface="Arial"/>
+        <a:font script="Uigh" typeface="Microsoft Uighur"/>
+        <a:font script="Geor" typeface="Sylfaen"/>
+        <a:font script="Armn" typeface="Arial"/>
+        <a:font script="Bugi" typeface="Leelawadee UI"/>
+        <a:font script="Bopo" typeface="Microsoft JhengHei"/>
+        <a:font script="Java" typeface="Javanese Text"/>
+        <a:font script="Lisu" typeface="Segoe UI"/>
+        <a:font script="Mymr" typeface="Myanmar Text"/>
+        <a:font script="Nkoo" typeface="Ebrima"/>
+        <a:font script="Olck" typeface="Nirmala UI"/>
+        <a:font script="Osma" typeface="Ebrima"/>
+        <a:font script="Phag" typeface="Phagspa"/>
+        <a:font script="Syrn" typeface="Estrangelo Edessa"/>
+        <a:font script="Syrj" typeface="Estrangelo Edessa"/>
+        <a:font script="Syre" typeface="Estrangelo Edessa"/>
+        <a:font script="Sora" typeface="Nirmala UI"/>
+        <a:font script="Tale" typeface="Microsoft Tai Le"/>
+        <a:font script="Talu" typeface="Microsoft New Tai Lue"/>
+        <a:font script="Tfng" typeface="Ebrima"/>
+      </a:minorFont>
+    </a:fontScheme>
+    <a:fmtScheme name="Office">
+      <a:fillStyleLst>
+        <a:solidFill>
+          <a:schemeClr val="phClr"/>
+        </a:solidFill>
+        <a:gradFill rotWithShape="1">
+          <a:gsLst>
+            <a:gs pos="0">
+              <a:schemeClr val="phClr">
+                <a:lumMod val="110000"/>
+                <a:satMod val="105000"/>
+                <a:tint val="67000"/>
+              </a:schemeClr>
+            </a:gs>
+            <a:gs pos="50000">
+              <a:schemeClr val="phClr">
+                <a:lumMod val="105000"/>
+                <a:satMod val="103000"/>
+                <a:tint val="73000"/>
+              </a:schemeClr>
+            </a:gs>
+            <a:gs pos="100000">
+              <a:schemeClr val="phClr">
+                <a:lumMod val="105000"/>
+                <a:satMod val="109000"/>
+                <a:tint val="81000"/>
+              </a:schemeClr>
+            </a:gs>
+          </a:gsLst>
+          <a:lin ang="5400000" scaled="0"/>
+        </a:gradFill>
+        <a:gradFill rotWithShape="1">
+          <a:gsLst>
+            <a:gs pos="0">
+              <a:schemeClr val="phClr">
+                <a:satMod val="103000"/>
+                <a:lumMod val="102000"/>
+                <a:tint val="94000"/>
+              </a:schemeClr>
+            </a:gs>
+            <a:gs pos="50000">
+              <a:schemeClr val="phClr">
+                <a:satMod val="110000"/>
+                <a:lumMod val="100000"/>
+                <a:shade val="100000"/>
+              </a:schemeClr>
+            </a:gs>
+            <a:gs pos="100000">
+              <a:schemeClr val="phClr">
+                <a:lumMod val="99000"/>
+                <a:satMod val="120000"/>
+                <a:shade val="78000"/>
+              </a:schemeClr>
+            </a:gs>
+          </a:gsLst>
+          <a:lin ang="5400000" scaled="0"/>
+        </a:gradFill>
+      </a:fillStyleLst>
+      <a:lnStyleLst>
+        <a:ln w="12700" cap="flat" cmpd="sng" algn="ctr">
+          <a:solidFill>
+            <a:schemeClr val="phClr"/>
+          </a:solidFill>
+          <a:prstDash val="solid"/>
+          <a:miter lim="800000"/>
+        </a:ln>
+        <a:ln w="19050" cap="flat" cmpd="sng" algn="ctr">
+          <a:solidFill>
+            <a:schemeClr val="phClr"/>
+          </a:solidFill>
+          <a:prstDash val="solid"/>
+          <a:miter lim="800000"/>
+        </a:ln>
+        <a:ln w="25400" cap="flat" cmpd="sng" algn="ctr">
+          <a:solidFill>
+            <a:schemeClr val="phClr"/>
+          </a:solidFill>
+          <a:prstDash val="solid"/>
+          <a:miter lim="800000"/>
+        </a:ln>
+      </a:lnStyleLst>
+      <a:effectStyleLst>
+        <a:effectStyle>
+          <a:effectLst/>
+        </a:effectStyle>
+        <a:effectStyle>
+          <a:effectLst/>
+        </a:effectStyle>
+        <a:effectStyle>
+          <a:effectLst>
+            <a:outerShdw blurRad="57150" dist="19050" dir="5400000" algn="ctr" rotWithShape="0">
+              <a:srgbClr val="000000">
+                <a:alpha val="63000"/>
+              </a:srgbClr>
+            </a:outerShdw>
+          </a:effectLst>
+        </a:effectStyle>
+      </a:effectStyleLst>
+      <a:bgFillStyleLst>
+        <a:solidFill>
+          <a:schemeClr val="phClr"/>
+        </a:solidFill>
+        <a:solidFill>
+          <a:schemeClr val="phClr">
+            <a:tint val="95000"/>
+            <a:satMod val="170000"/>
+          </a:schemeClr>
+        </a:solidFill>
+        <a:gradFill rotWithShape="1">
+          <a:gsLst>
+            <a:gs pos="0">
+              <a:schemeClr val="phClr">
+                <a:tint val="93000"/>
+                <a:satMod val="150000"/>
+                <a:shade val="98000"/>
+                <a:lumMod val="102000"/>
+              </a:schemeClr>
+            </a:gs>
+            <a:gs pos="50000">
+              <a:schemeClr val="phClr">
+                <a:tint val="98000"/>
+                <a:satMod val="130000"/>
+                <a:shade val="90000"/>
+                <a:lumMod val="103000"/>
+              </a:schemeClr>
+            </a:gs>
+            <a:gs pos="100000">
+              <a:schemeClr val="phClr">
+                <a:shade val="63000"/>
+                <a:satMod val="120000"/>
+              </a:schemeClr>
+            </a:gs>
+          </a:gsLst>
+          <a:lin ang="5400000" scaled="0"/>
+        </a:gradFill>
+      </a:bgFillStyleLst>
+    </a:fmtScheme>
+  </a:themeElements>
+  <a:objectDefaults>
+    <a:lnDef>
+      <a:spPr/>
+      <a:bodyPr/>
+      <a:lstStyle/>
+      <a:style>
+        <a:lnRef idx="2">
+          <a:schemeClr val="accent1"/>
+        </a:lnRef>
+        <a:fillRef idx="0">
+          <a:schemeClr val="accent1"/>
+        </a:fillRef>
+        <a:effectRef idx="1">
+          <a:schemeClr val="accent1"/>
+        </a:effectRef>
+        <a:fontRef idx="minor">
+          <a:schemeClr val="tx1"/>
+        </a:fontRef>
+      </a:style>
+    </a:lnDef>
+  </a:objectDefaults>
+  <a:extraClrSchemeLst/>
+  <a:extLst>
+    <a:ext uri="{05A4C25C-085E-4340-85A3-A5531E510DB2}">
+      <thm15:themeFamily xmlns:thm15="http://schemas.microsoft.com/office/thememl/2012/main" name="Office Theme" id="{2E142A2C-CD16-42D6-873A-C26D2A0506FA}" vid="{1BDDFF52-6CD6-40A5-AB3C-68EB2F1E4D0A}"/>
+    </a:ext>
+  </a:extLst>
+</a:theme>
 </file>